--- a/reports/PickSense_Updated_Project_Presentation.pptx
+++ b/reports/PickSense_Updated_Project_Presentation.pptx
@@ -4,16 +4,19 @@
   <p:sldMasterIdLst>
     <p:sldMasterId id="2147483648" r:id="rId1"/>
   </p:sldMasterIdLst>
+  <p:notesMasterIdLst>
+    <p:notesMasterId r:id="rId9"/>
+  </p:notesMasterIdLst>
   <p:sldIdLst>
-    <p:sldId id="256" r:id="rId7"/>
-    <p:sldId id="257" r:id="rId9"/>
-    <p:sldId id="258" r:id="rId10"/>
-    <p:sldId id="259" r:id="rId11"/>
-    <p:sldId id="260" r:id="rId12"/>
-    <p:sldId id="261" r:id="rId13"/>
-    <p:sldId id="262" r:id="rId14"/>
+    <p:sldId id="256" r:id="rId2"/>
+    <p:sldId id="257" r:id="rId3"/>
+    <p:sldId id="258" r:id="rId4"/>
+    <p:sldId id="259" r:id="rId5"/>
+    <p:sldId id="260" r:id="rId6"/>
+    <p:sldId id="261" r:id="rId7"/>
+    <p:sldId id="262" r:id="rId8"/>
   </p:sldIdLst>
-  <p:sldSz cx="12191695" cy="6858000" type="screen4x3"/>
+  <p:sldSz cx="12192000" cy="6858000"/>
   <p:notesSz cx="6858000" cy="9144000"/>
   <p:defaultTextStyle>
     <a:defPPr>
@@ -110,11 +113,27 @@
       </a:defRPr>
     </a:lvl9pPr>
   </p:defaultTextStyle>
+  <p:extLst>
+    <p:ext uri="{EFAFB233-063F-42B5-8137-9DF3F51BA10A}">
+      <p15:sldGuideLst xmlns:p15="http://schemas.microsoft.com/office/powerpoint/2012/main">
+        <p15:guide id="1" orient="horz" pos="2160">
+          <p15:clr>
+            <a:srgbClr val="A4A3A4"/>
+          </p15:clr>
+        </p15:guide>
+        <p15:guide id="2" pos="2880">
+          <p15:clr>
+            <a:srgbClr val="A4A3A4"/>
+          </p15:clr>
+        </p15:guide>
+      </p15:sldGuideLst>
+    </p:ext>
+  </p:extLst>
 </p:presentation>
 </file>
 
 <file path=ppt/notesMasters/notesMaster1.xml><?xml version="1.0" encoding="utf-8"?>
-<p:notesMaster xmlns:a="http://schemas.openxmlformats.org/drawingml/2006/main" xmlns:p="http://schemas.openxmlformats.org/presentationml/2006/main" xmlns:r="http://schemas.openxmlformats.org/officeDocument/2006/relationships">
+<p:notesMaster xmlns:a="http://schemas.openxmlformats.org/drawingml/2006/main" xmlns:r="http://schemas.openxmlformats.org/officeDocument/2006/relationships" xmlns:p="http://schemas.openxmlformats.org/presentationml/2006/main">
   <p:cSld>
     <p:bg>
       <p:bgRef idx="1001">
@@ -135,241 +154,16 @@
           <a:chExt cx="0" cy="0"/>
         </a:xfrm>
       </p:grpSpPr>
-      <p:sp>
-        <p:nvSpPr>
-          <p:cNvPr id="2" name="Header Placeholder 1"/>
-          <p:cNvSpPr>
-            <a:spLocks noGrp="1"/>
-          </p:cNvSpPr>
-          <p:nvPr>
-            <p:ph type="hdr" sz="quarter"/>
-          </p:nvPr>
-        </p:nvSpPr>
-        <p:spPr>
-          <a:xfrm>
-            <a:off x="0" y="0"/>
-            <a:ext cx="2971800" cy="457200"/>
-          </a:xfrm>
-          <a:prstGeom prst="rect">
-            <a:avLst/>
-          </a:prstGeom>
-        </p:spPr>
-        <p:txBody>
-          <a:bodyPr vert="horz" lIns="91440" tIns="45720" rIns="91440" bIns="45720" rtlCol="0"/>
-          <a:lstStyle>
-            <a:lvl1pPr algn="l">
-              <a:defRPr sz="1200"/>
-            </a:lvl1pPr>
-          </a:lstStyle>
-          <a:p>
-            <a:endParaRPr lang="en-US"/>
-          </a:p>
-        </p:txBody>
-      </p:sp>
-      <p:sp>
-        <p:nvSpPr>
-          <p:cNvPr id="3" name="Date Placeholder 2"/>
-          <p:cNvSpPr>
-            <a:spLocks noGrp="1"/>
-          </p:cNvSpPr>
-          <p:nvPr>
-            <p:ph type="dt" idx="1"/>
-          </p:nvPr>
-        </p:nvSpPr>
-        <p:spPr>
-          <a:xfrm>
-            <a:off x="3884613" y="0"/>
-            <a:ext cx="2971800" cy="457200"/>
-          </a:xfrm>
-          <a:prstGeom prst="rect">
-            <a:avLst/>
-          </a:prstGeom>
-        </p:spPr>
-        <p:txBody>
-          <a:bodyPr vert="horz" lIns="91440" tIns="45720" rIns="91440" bIns="45720" rtlCol="0"/>
-          <a:lstStyle>
-            <a:lvl1pPr algn="r">
-              <a:defRPr sz="1200"/>
-            </a:lvl1pPr>
-          </a:lstStyle>
-          <a:p>
-            <a:fld id="{0F89C1C7-3DCD-1040-A9CF-14679D8B5DDD}" type="datetimeFigureOut">
-              <a:rPr lang="en-US" smtClean="0"/>
-              <a:t>10/17/16</a:t>
-            </a:fld>
-            <a:endParaRPr lang="en-US"/>
-          </a:p>
-        </p:txBody>
-      </p:sp>
-      <p:sp>
-        <p:nvSpPr>
-          <p:cNvPr id="4" name="Slide Image Placeholder 3"/>
-          <p:cNvSpPr>
-            <a:spLocks noGrp="1" noRot="1" noChangeAspect="1"/>
-          </p:cNvSpPr>
-          <p:nvPr>
-            <p:ph type="sldImg" idx="2"/>
-          </p:nvPr>
-        </p:nvSpPr>
-        <p:spPr>
-          <a:xfrm>
-            <a:off x="1143000" y="685800"/>
-            <a:ext cx="4572000" cy="3429000"/>
-          </a:xfrm>
-          <a:prstGeom prst="rect">
-            <a:avLst/>
-          </a:prstGeom>
-          <a:noFill/>
-          <a:ln w="12700">
-            <a:solidFill>
-              <a:prstClr val="black"/>
-            </a:solidFill>
-          </a:ln>
-        </p:spPr>
-        <p:txBody>
-          <a:bodyPr vert="horz" lIns="91440" tIns="45720" rIns="91440" bIns="45720" rtlCol="0" anchor="ctr"/>
-          <a:lstStyle/>
-          <a:p>
-            <a:endParaRPr lang="en-US"/>
-          </a:p>
-        </p:txBody>
-      </p:sp>
-      <p:sp>
-        <p:nvSpPr>
-          <p:cNvPr id="5" name="Notes Placeholder 4"/>
-          <p:cNvSpPr>
-            <a:spLocks noGrp="1"/>
-          </p:cNvSpPr>
-          <p:nvPr>
-            <p:ph type="body" sz="quarter" idx="3"/>
-          </p:nvPr>
-        </p:nvSpPr>
-        <p:spPr>
-          <a:xfrm>
-            <a:off x="685800" y="4343400"/>
-            <a:ext cx="5486400" cy="4114800"/>
-          </a:xfrm>
-          <a:prstGeom prst="rect">
-            <a:avLst/>
-          </a:prstGeom>
-        </p:spPr>
-        <p:txBody>
-          <a:bodyPr vert="horz" lIns="91440" tIns="45720" rIns="91440" bIns="45720" rtlCol="0"/>
-          <a:lstStyle/>
-          <a:p>
-            <a:pPr lvl="0"/>
-            <a:r>
-              <a:rPr lang="en-US" smtClean="0"/>
-              <a:t>Click to edit Master text styles</a:t>
-            </a:r>
-          </a:p>
-          <a:p>
-            <a:pPr lvl="1"/>
-            <a:r>
-              <a:rPr lang="en-US" smtClean="0"/>
-              <a:t>Second level</a:t>
-            </a:r>
-          </a:p>
-          <a:p>
-            <a:pPr lvl="2"/>
-            <a:r>
-              <a:rPr lang="en-US" smtClean="0"/>
-              <a:t>Third level</a:t>
-            </a:r>
-          </a:p>
-          <a:p>
-            <a:pPr lvl="3"/>
-            <a:r>
-              <a:rPr lang="en-US" smtClean="0"/>
-              <a:t>Fourth level</a:t>
-            </a:r>
-          </a:p>
-          <a:p>
-            <a:pPr lvl="4"/>
-            <a:r>
-              <a:rPr lang="en-US" smtClean="0"/>
-              <a:t>Fifth level</a:t>
-            </a:r>
-            <a:endParaRPr lang="en-US"/>
-          </a:p>
-        </p:txBody>
-      </p:sp>
-      <p:sp>
-        <p:nvSpPr>
-          <p:cNvPr id="6" name="Footer Placeholder 5"/>
-          <p:cNvSpPr>
-            <a:spLocks noGrp="1"/>
-          </p:cNvSpPr>
-          <p:nvPr>
-            <p:ph type="ftr" sz="quarter" idx="4"/>
-          </p:nvPr>
-        </p:nvSpPr>
-        <p:spPr>
-          <a:xfrm>
-            <a:off x="0" y="8685213"/>
-            <a:ext cx="2971800" cy="457200"/>
-          </a:xfrm>
-          <a:prstGeom prst="rect">
-            <a:avLst/>
-          </a:prstGeom>
-        </p:spPr>
-        <p:txBody>
-          <a:bodyPr vert="horz" lIns="91440" tIns="45720" rIns="91440" bIns="45720" rtlCol="0" anchor="b"/>
-          <a:lstStyle>
-            <a:lvl1pPr algn="l">
-              <a:defRPr sz="1200"/>
-            </a:lvl1pPr>
-          </a:lstStyle>
-          <a:p>
-            <a:endParaRPr lang="en-US"/>
-          </a:p>
-        </p:txBody>
-      </p:sp>
-      <p:sp>
-        <p:nvSpPr>
-          <p:cNvPr id="7" name="Slide Number Placeholder 6"/>
-          <p:cNvSpPr>
-            <a:spLocks noGrp="1"/>
-          </p:cNvSpPr>
-          <p:nvPr>
-            <p:ph type="sldNum" sz="quarter" idx="5"/>
-          </p:nvPr>
-        </p:nvSpPr>
-        <p:spPr>
-          <a:xfrm>
-            <a:off x="3884613" y="8685213"/>
-            <a:ext cx="2971800" cy="457200"/>
-          </a:xfrm>
-          <a:prstGeom prst="rect">
-            <a:avLst/>
-          </a:prstGeom>
-        </p:spPr>
-        <p:txBody>
-          <a:bodyPr vert="horz" lIns="91440" tIns="45720" rIns="91440" bIns="45720" rtlCol="0" anchor="b"/>
-          <a:lstStyle>
-            <a:lvl1pPr algn="r">
-              <a:defRPr sz="1200"/>
-            </a:lvl1pPr>
-          </a:lstStyle>
-          <a:p>
-            <a:fld id="{BB5E49A5-4136-284D-997B-48E1D791AD67}" type="slidenum">
-              <a:rPr lang="en-US" smtClean="0"/>
-              <a:t>‹#›</a:t>
-            </a:fld>
-            <a:endParaRPr lang="en-US"/>
-          </a:p>
-        </p:txBody>
-      </p:sp>
     </p:spTree>
     <p:extLst>
       <p:ext uri="{BB962C8B-B14F-4D97-AF65-F5344CB8AC3E}">
-        <p14:creationId xmlns:p14="http://schemas.microsoft.com/office/powerpoint/2010/main" val="2623252185"/>
+        <p14:creationId xmlns:p14="http://schemas.microsoft.com/office/powerpoint/2010/main" val="1681926313"/>
       </p:ext>
     </p:extLst>
   </p:cSld>
   <p:clrMap bg1="lt1" tx1="dk1" bg2="lt2" tx2="dk2" accent1="accent1" accent2="accent2" accent3="accent3" accent4="accent4" accent5="accent5" accent6="accent6" hlink="hlink" folHlink="folHlink"/>
   <p:notesStyle>
-    <a:lvl1pPr marL="0" algn="l" defTabSz="457200" rtl="0" eaLnBrk="1" latinLnBrk="0" hangingPunct="1">
+    <a:lvl1pPr marL="0" algn="l" defTabSz="914400" rtl="0" eaLnBrk="1" latinLnBrk="0" hangingPunct="1">
       <a:defRPr sz="1200" kern="1200">
         <a:solidFill>
           <a:schemeClr val="tx1"/>
@@ -379,7 +173,7 @@
         <a:cs typeface="+mn-cs"/>
       </a:defRPr>
     </a:lvl1pPr>
-    <a:lvl2pPr marL="457200" algn="l" defTabSz="457200" rtl="0" eaLnBrk="1" latinLnBrk="0" hangingPunct="1">
+    <a:lvl2pPr marL="457200" algn="l" defTabSz="914400" rtl="0" eaLnBrk="1" latinLnBrk="0" hangingPunct="1">
       <a:defRPr sz="1200" kern="1200">
         <a:solidFill>
           <a:schemeClr val="tx1"/>
@@ -389,7 +183,7 @@
         <a:cs typeface="+mn-cs"/>
       </a:defRPr>
     </a:lvl2pPr>
-    <a:lvl3pPr marL="914400" algn="l" defTabSz="457200" rtl="0" eaLnBrk="1" latinLnBrk="0" hangingPunct="1">
+    <a:lvl3pPr marL="914400" algn="l" defTabSz="914400" rtl="0" eaLnBrk="1" latinLnBrk="0" hangingPunct="1">
       <a:defRPr sz="1200" kern="1200">
         <a:solidFill>
           <a:schemeClr val="tx1"/>
@@ -399,7 +193,7 @@
         <a:cs typeface="+mn-cs"/>
       </a:defRPr>
     </a:lvl3pPr>
-    <a:lvl4pPr marL="1371600" algn="l" defTabSz="457200" rtl="0" eaLnBrk="1" latinLnBrk="0" hangingPunct="1">
+    <a:lvl4pPr marL="1371600" algn="l" defTabSz="914400" rtl="0" eaLnBrk="1" latinLnBrk="0" hangingPunct="1">
       <a:defRPr sz="1200" kern="1200">
         <a:solidFill>
           <a:schemeClr val="tx1"/>
@@ -409,7 +203,7 @@
         <a:cs typeface="+mn-cs"/>
       </a:defRPr>
     </a:lvl4pPr>
-    <a:lvl5pPr marL="1828800" algn="l" defTabSz="457200" rtl="0" eaLnBrk="1" latinLnBrk="0" hangingPunct="1">
+    <a:lvl5pPr marL="1828800" algn="l" defTabSz="914400" rtl="0" eaLnBrk="1" latinLnBrk="0" hangingPunct="1">
       <a:defRPr sz="1200" kern="1200">
         <a:solidFill>
           <a:schemeClr val="tx1"/>
@@ -419,7 +213,7 @@
         <a:cs typeface="+mn-cs"/>
       </a:defRPr>
     </a:lvl5pPr>
-    <a:lvl6pPr marL="2286000" algn="l" defTabSz="457200" rtl="0" eaLnBrk="1" latinLnBrk="0" hangingPunct="1">
+    <a:lvl6pPr marL="2286000" algn="l" defTabSz="914400" rtl="0" eaLnBrk="1" latinLnBrk="0" hangingPunct="1">
       <a:defRPr sz="1200" kern="1200">
         <a:solidFill>
           <a:schemeClr val="tx1"/>
@@ -429,7 +223,7 @@
         <a:cs typeface="+mn-cs"/>
       </a:defRPr>
     </a:lvl6pPr>
-    <a:lvl7pPr marL="2743200" algn="l" defTabSz="457200" rtl="0" eaLnBrk="1" latinLnBrk="0" hangingPunct="1">
+    <a:lvl7pPr marL="2743200" algn="l" defTabSz="914400" rtl="0" eaLnBrk="1" latinLnBrk="0" hangingPunct="1">
       <a:defRPr sz="1200" kern="1200">
         <a:solidFill>
           <a:schemeClr val="tx1"/>
@@ -439,7 +233,7 @@
         <a:cs typeface="+mn-cs"/>
       </a:defRPr>
     </a:lvl7pPr>
-    <a:lvl8pPr marL="3200400" algn="l" defTabSz="457200" rtl="0" eaLnBrk="1" latinLnBrk="0" hangingPunct="1">
+    <a:lvl8pPr marL="3200400" algn="l" defTabSz="914400" rtl="0" eaLnBrk="1" latinLnBrk="0" hangingPunct="1">
       <a:defRPr sz="1200" kern="1200">
         <a:solidFill>
           <a:schemeClr val="tx1"/>
@@ -449,7 +243,7 @@
         <a:cs typeface="+mn-cs"/>
       </a:defRPr>
     </a:lvl8pPr>
-    <a:lvl9pPr marL="3657600" algn="l" defTabSz="457200" rtl="0" eaLnBrk="1" latinLnBrk="0" hangingPunct="1">
+    <a:lvl9pPr marL="3657600" algn="l" defTabSz="914400" rtl="0" eaLnBrk="1" latinLnBrk="0" hangingPunct="1">
       <a:defRPr sz="1200" kern="1200">
         <a:solidFill>
           <a:schemeClr val="tx1"/>
@@ -464,7 +258,7 @@
 </file>
 
 <file path=ppt/notesSlides/notesSlide1.xml><?xml version="1.0" encoding="utf-8"?>
-<p:notes xmlns:a="http://schemas.openxmlformats.org/drawingml/2006/main" xmlns:p="http://schemas.openxmlformats.org/presentationml/2006/main" xmlns:r="http://schemas.openxmlformats.org/officeDocument/2006/relationships">
+<p:notes xmlns:a="http://schemas.openxmlformats.org/drawingml/2006/main" xmlns:r="http://schemas.openxmlformats.org/officeDocument/2006/relationships" xmlns:p="http://schemas.openxmlformats.org/presentationml/2006/main">
   <p:cSld>
     <p:spTree>
       <p:nvGrpSpPr>
@@ -484,13 +278,20 @@
         <p:nvSpPr>
           <p:cNvPr id="2" name="Slide Image Placeholder 1"/>
           <p:cNvSpPr>
-            <a:spLocks noGrp="1"/>
+            <a:spLocks noGrp="1" noRot="1" noChangeAspect="1"/>
           </p:cNvSpPr>
           <p:nvPr>
             <p:ph type="sldImg" idx="2"/>
           </p:nvPr>
         </p:nvSpPr>
         <p:spPr/>
+        <p:txBody>
+          <a:bodyPr/>
+          <a:lstStyle/>
+          <a:p>
+            <a:endParaRPr lang="en-US"/>
+          </a:p>
+        </p:txBody>
       </p:sp>
       <p:sp>
         <p:nvSpPr>
@@ -499,7 +300,7 @@
             <a:spLocks noGrp="1"/>
           </p:cNvSpPr>
           <p:nvPr>
-            <p:ph type="body" idx="3" sz="quarter"/>
+            <p:ph type="body" sz="quarter" idx="3"/>
           </p:nvPr>
         </p:nvSpPr>
         <p:spPr/>
@@ -511,7 +312,9 @@
               <a:t>PickSense is a computer vision project focused on object occlusion. The goal is to classify an object as clear, partially occluded, or heavily occluded. This is a supervised multiclass classification problem and represents an early perception step that could help a robot understand what it can see before interacting with an object. The updated project now uses 3,600 images and reaches 90.5 percent test accuracy.</a:t>
             </a:r>
           </a:p>
-          <a:p/>
+          <a:p>
+            <a:endParaRPr/>
+          </a:p>
           <a:p>
             <a:r>
               <a:t>Suggested time: ~30 seconds.</a:t>
@@ -526,10 +329,17 @@
             <a:spLocks noGrp="1"/>
           </p:cNvSpPr>
           <p:nvPr>
-            <p:ph type="sldNum" idx="5" sz="quarter"/>
+            <p:ph type="sldNum" sz="quarter" idx="5"/>
           </p:nvPr>
         </p:nvSpPr>
         <p:spPr/>
+        <p:txBody>
+          <a:bodyPr/>
+          <a:lstStyle/>
+          <a:p>
+            <a:endParaRPr lang="en-US"/>
+          </a:p>
+        </p:txBody>
       </p:sp>
     </p:spTree>
   </p:cSld>
@@ -540,7 +350,7 @@
 </file>
 
 <file path=ppt/notesSlides/notesSlide2.xml><?xml version="1.0" encoding="utf-8"?>
-<p:notes xmlns:a="http://schemas.openxmlformats.org/drawingml/2006/main" xmlns:p="http://schemas.openxmlformats.org/presentationml/2006/main" xmlns:r="http://schemas.openxmlformats.org/officeDocument/2006/relationships">
+<p:notes xmlns:a="http://schemas.openxmlformats.org/drawingml/2006/main" xmlns:r="http://schemas.openxmlformats.org/officeDocument/2006/relationships" xmlns:p="http://schemas.openxmlformats.org/presentationml/2006/main">
   <p:cSld>
     <p:spTree>
       <p:nvGrpSpPr>
@@ -560,13 +370,20 @@
         <p:nvSpPr>
           <p:cNvPr id="2" name="Slide Image Placeholder 1"/>
           <p:cNvSpPr>
-            <a:spLocks noGrp="1"/>
+            <a:spLocks noGrp="1" noRot="1" noChangeAspect="1"/>
           </p:cNvSpPr>
           <p:nvPr>
             <p:ph type="sldImg" idx="2"/>
           </p:nvPr>
         </p:nvSpPr>
         <p:spPr/>
+        <p:txBody>
+          <a:bodyPr/>
+          <a:lstStyle/>
+          <a:p>
+            <a:endParaRPr lang="en-US"/>
+          </a:p>
+        </p:txBody>
       </p:sp>
       <p:sp>
         <p:nvSpPr>
@@ -575,7 +392,7 @@
             <a:spLocks noGrp="1"/>
           </p:cNvSpPr>
           <p:nvPr>
-            <p:ph type="body" idx="3" sz="quarter"/>
+            <p:ph type="body" sz="quarter" idx="3"/>
           </p:nvPr>
         </p:nvSpPr>
         <p:spPr/>
@@ -587,7 +404,9 @@
               <a:t>Robots need visual information before they can manipulate objects. In real environments, objects are often partially hidden. PickSense focuses specifically on this perception problem. Given an image, the model must choose one of three occlusion levels. At this stage, PickSense is not predicting whether the robot can successfully grasp the object. It is first learning to understand how visible the object is.</a:t>
             </a:r>
           </a:p>
-          <a:p/>
+          <a:p>
+            <a:endParaRPr/>
+          </a:p>
           <a:p>
             <a:r>
               <a:t>Suggested time: ~40 seconds.</a:t>
@@ -602,10 +421,17 @@
             <a:spLocks noGrp="1"/>
           </p:cNvSpPr>
           <p:nvPr>
-            <p:ph type="sldNum" idx="5" sz="quarter"/>
+            <p:ph type="sldNum" sz="quarter" idx="5"/>
           </p:nvPr>
         </p:nvSpPr>
         <p:spPr/>
+        <p:txBody>
+          <a:bodyPr/>
+          <a:lstStyle/>
+          <a:p>
+            <a:endParaRPr lang="en-US"/>
+          </a:p>
+        </p:txBody>
       </p:sp>
     </p:spTree>
   </p:cSld>
@@ -616,7 +442,7 @@
 </file>
 
 <file path=ppt/notesSlides/notesSlide3.xml><?xml version="1.0" encoding="utf-8"?>
-<p:notes xmlns:a="http://schemas.openxmlformats.org/drawingml/2006/main" xmlns:p="http://schemas.openxmlformats.org/presentationml/2006/main" xmlns:r="http://schemas.openxmlformats.org/officeDocument/2006/relationships">
+<p:notes xmlns:a="http://schemas.openxmlformats.org/drawingml/2006/main" xmlns:r="http://schemas.openxmlformats.org/officeDocument/2006/relationships" xmlns:p="http://schemas.openxmlformats.org/presentationml/2006/main">
   <p:cSld>
     <p:spTree>
       <p:nvGrpSpPr>
@@ -636,13 +462,20 @@
         <p:nvSpPr>
           <p:cNvPr id="2" name="Slide Image Placeholder 1"/>
           <p:cNvSpPr>
-            <a:spLocks noGrp="1"/>
+            <a:spLocks noGrp="1" noRot="1" noChangeAspect="1"/>
           </p:cNvSpPr>
           <p:nvPr>
             <p:ph type="sldImg" idx="2"/>
           </p:nvPr>
         </p:nvSpPr>
         <p:spPr/>
+        <p:txBody>
+          <a:bodyPr/>
+          <a:lstStyle/>
+          <a:p>
+            <a:endParaRPr lang="en-US"/>
+          </a:p>
+        </p:txBody>
       </p:sp>
       <p:sp>
         <p:nvSpPr>
@@ -651,7 +484,7 @@
             <a:spLocks noGrp="1"/>
           </p:cNvSpPr>
           <p:nvPr>
-            <p:ph type="body" idx="3" sz="quarter"/>
+            <p:ph type="body" sz="quarter" idx="3"/>
           </p:nvPr>
         </p:nvSpPr>
         <p:spPr/>
@@ -663,7 +496,9 @@
               <a:t>I organized PickSense as several layers instead of putting everything into one notebook. The data layer prepares and stores the data. PyTorch DataLoaders feed batches to the models. The model layer contains my Vision Transformer experiments. The training layer handles optimization on the GPU, and the evaluation layer now measures accuracy, class-level performance, and predictions across the complete test set.</a:t>
             </a:r>
           </a:p>
-          <a:p/>
+          <a:p>
+            <a:endParaRPr/>
+          </a:p>
           <a:p>
             <a:r>
               <a:t>Suggested time: ~48 seconds.</a:t>
@@ -678,10 +513,17 @@
             <a:spLocks noGrp="1"/>
           </p:cNvSpPr>
           <p:nvPr>
-            <p:ph type="sldNum" idx="5" sz="quarter"/>
+            <p:ph type="sldNum" sz="quarter" idx="5"/>
           </p:nvPr>
         </p:nvSpPr>
         <p:spPr/>
+        <p:txBody>
+          <a:bodyPr/>
+          <a:lstStyle/>
+          <a:p>
+            <a:endParaRPr lang="en-US"/>
+          </a:p>
+        </p:txBody>
       </p:sp>
     </p:spTree>
   </p:cSld>
@@ -692,7 +534,7 @@
 </file>
 
 <file path=ppt/notesSlides/notesSlide4.xml><?xml version="1.0" encoding="utf-8"?>
-<p:notes xmlns:a="http://schemas.openxmlformats.org/drawingml/2006/main" xmlns:p="http://schemas.openxmlformats.org/presentationml/2006/main" xmlns:r="http://schemas.openxmlformats.org/officeDocument/2006/relationships">
+<p:notes xmlns:a="http://schemas.openxmlformats.org/drawingml/2006/main" xmlns:r="http://schemas.openxmlformats.org/officeDocument/2006/relationships" xmlns:p="http://schemas.openxmlformats.org/presentationml/2006/main">
   <p:cSld>
     <p:spTree>
       <p:nvGrpSpPr>
@@ -712,13 +554,20 @@
         <p:nvSpPr>
           <p:cNvPr id="2" name="Slide Image Placeholder 1"/>
           <p:cNvSpPr>
-            <a:spLocks noGrp="1"/>
+            <a:spLocks noGrp="1" noRot="1" noChangeAspect="1"/>
           </p:cNvSpPr>
           <p:nvPr>
             <p:ph type="sldImg" idx="2"/>
           </p:nvPr>
         </p:nvSpPr>
         <p:spPr/>
+        <p:txBody>
+          <a:bodyPr/>
+          <a:lstStyle/>
+          <a:p>
+            <a:endParaRPr lang="en-US"/>
+          </a:p>
+        </p:txBody>
       </p:sp>
       <p:sp>
         <p:nvSpPr>
@@ -727,7 +576,7 @@
             <a:spLocks noGrp="1"/>
           </p:cNvSpPr>
           <p:nvPr>
-            <p:ph type="body" idx="3" sz="quarter"/>
+            <p:ph type="body" sz="quarter" idx="3"/>
           </p:nvPr>
         </p:nvSpPr>
         <p:spPr/>
@@ -739,7 +588,9 @@
               <a:t>One challenge was repeatedly downloading data whenever Colab disconnected. I separated preparation from training. Notebook 00 downloads and stores the prepared data permanently in Google Drive. Notebook 01 only verifies and loads it. I initially used a 300-image prototype to debug the pipeline quickly. After the pipeline worked, I expanded it to 3,600 balanced images: 3,000 for training and 600 for testing, while preserving the original OpenLORIS splits.</a:t>
             </a:r>
           </a:p>
-          <a:p/>
+          <a:p>
+            <a:endParaRPr/>
+          </a:p>
           <a:p>
             <a:r>
               <a:t>Suggested time: ~45 seconds.</a:t>
@@ -754,10 +605,17 @@
             <a:spLocks noGrp="1"/>
           </p:cNvSpPr>
           <p:nvPr>
-            <p:ph type="sldNum" idx="5" sz="quarter"/>
+            <p:ph type="sldNum" sz="quarter" idx="5"/>
           </p:nvPr>
         </p:nvSpPr>
         <p:spPr/>
+        <p:txBody>
+          <a:bodyPr/>
+          <a:lstStyle/>
+          <a:p>
+            <a:endParaRPr lang="en-US"/>
+          </a:p>
+        </p:txBody>
       </p:sp>
     </p:spTree>
   </p:cSld>
@@ -768,7 +626,7 @@
 </file>
 
 <file path=ppt/notesSlides/notesSlide5.xml><?xml version="1.0" encoding="utf-8"?>
-<p:notes xmlns:a="http://schemas.openxmlformats.org/drawingml/2006/main" xmlns:p="http://schemas.openxmlformats.org/presentationml/2006/main" xmlns:r="http://schemas.openxmlformats.org/officeDocument/2006/relationships">
+<p:notes xmlns:a="http://schemas.openxmlformats.org/drawingml/2006/main" xmlns:r="http://schemas.openxmlformats.org/officeDocument/2006/relationships" xmlns:p="http://schemas.openxmlformats.org/presentationml/2006/main">
   <p:cSld>
     <p:spTree>
       <p:nvGrpSpPr>
@@ -788,13 +646,20 @@
         <p:nvSpPr>
           <p:cNvPr id="2" name="Slide Image Placeholder 1"/>
           <p:cNvSpPr>
-            <a:spLocks noGrp="1"/>
+            <a:spLocks noGrp="1" noRot="1" noChangeAspect="1"/>
           </p:cNvSpPr>
           <p:nvPr>
             <p:ph type="sldImg" idx="2"/>
           </p:nvPr>
         </p:nvSpPr>
         <p:spPr/>
+        <p:txBody>
+          <a:bodyPr/>
+          <a:lstStyle/>
+          <a:p>
+            <a:endParaRPr lang="en-US"/>
+          </a:p>
+        </p:txBody>
       </p:sp>
       <p:sp>
         <p:nvSpPr>
@@ -803,7 +668,7 @@
             <a:spLocks noGrp="1"/>
           </p:cNvSpPr>
           <p:nvPr>
-            <p:ph type="body" idx="3" sz="quarter"/>
+            <p:ph type="body" sz="quarter" idx="3"/>
           </p:nvPr>
         </p:nvSpPr>
         <p:spPr/>
@@ -815,7 +680,9 @@
               <a:t>I first built a Vision Transformer from scratch. That path starts with no learned visual knowledge and must learn both features and classification from PickSense data. I also tested transfer learning with a pretrained ViT-B/16. Its backbone already represents shapes, edges, and textures, so I froze those parameters and trained a new three-class head. The scratch implementation also exposed architecture bugs that I corrected, including duplicated residual behavior and a global patch-size dependency. For the current dataset, the pretrained path is the strongest validated model.</a:t>
             </a:r>
           </a:p>
-          <a:p/>
+          <a:p>
+            <a:endParaRPr/>
+          </a:p>
           <a:p>
             <a:r>
               <a:t>Suggested time: ~48 seconds.</a:t>
@@ -830,10 +697,17 @@
             <a:spLocks noGrp="1"/>
           </p:cNvSpPr>
           <p:nvPr>
-            <p:ph type="sldNum" idx="5" sz="quarter"/>
+            <p:ph type="sldNum" sz="quarter" idx="5"/>
           </p:nvPr>
         </p:nvSpPr>
         <p:spPr/>
+        <p:txBody>
+          <a:bodyPr/>
+          <a:lstStyle/>
+          <a:p>
+            <a:endParaRPr lang="en-US"/>
+          </a:p>
+        </p:txBody>
       </p:sp>
     </p:spTree>
   </p:cSld>
@@ -844,7 +718,7 @@
 </file>
 
 <file path=ppt/notesSlides/notesSlide6.xml><?xml version="1.0" encoding="utf-8"?>
-<p:notes xmlns:a="http://schemas.openxmlformats.org/drawingml/2006/main" xmlns:p="http://schemas.openxmlformats.org/presentationml/2006/main" xmlns:r="http://schemas.openxmlformats.org/officeDocument/2006/relationships">
+<p:notes xmlns:a="http://schemas.openxmlformats.org/drawingml/2006/main" xmlns:r="http://schemas.openxmlformats.org/officeDocument/2006/relationships" xmlns:p="http://schemas.openxmlformats.org/presentationml/2006/main">
   <p:cSld>
     <p:spTree>
       <p:nvGrpSpPr>
@@ -864,13 +738,20 @@
         <p:nvSpPr>
           <p:cNvPr id="2" name="Slide Image Placeholder 1"/>
           <p:cNvSpPr>
-            <a:spLocks noGrp="1"/>
+            <a:spLocks noGrp="1" noRot="1" noChangeAspect="1"/>
           </p:cNvSpPr>
           <p:nvPr>
             <p:ph type="sldImg" idx="2"/>
           </p:nvPr>
         </p:nvSpPr>
         <p:spPr/>
+        <p:txBody>
+          <a:bodyPr/>
+          <a:lstStyle/>
+          <a:p>
+            <a:endParaRPr lang="en-US"/>
+          </a:p>
+        </p:txBody>
       </p:sp>
       <p:sp>
         <p:nvSpPr>
@@ -879,7 +760,7 @@
             <a:spLocks noGrp="1"/>
           </p:cNvSpPr>
           <p:nvPr>
-            <p:ph type="body" idx="3" sz="quarter"/>
+            <p:ph type="body" sz="quarter" idx="3"/>
           </p:nvPr>
         </p:nvSpPr>
         <p:spPr/>
@@ -891,7 +772,9 @@
               <a:t>The most important result is the data-scaling comparison. With only 10 percent of the earlier pool, the pretrained model trained on 36 images and reached 58.3 percent test accuracy. After expanding the dataset and using all 3,000 training images, test accuracy reached 90.5 percent, a gain of 32.2 percentage points. Across classes, clear reached 93.5 percent, partially occluded 91 percent, and heavily occluded 87 percent. The remaining gap is concentrated most strongly in heavy occlusion.</a:t>
             </a:r>
           </a:p>
-          <a:p/>
+          <a:p>
+            <a:endParaRPr/>
+          </a:p>
           <a:p>
             <a:r>
               <a:t>Suggested time: ~55 seconds.</a:t>
@@ -906,10 +789,17 @@
             <a:spLocks noGrp="1"/>
           </p:cNvSpPr>
           <p:nvPr>
-            <p:ph type="sldNum" idx="5" sz="quarter"/>
+            <p:ph type="sldNum" sz="quarter" idx="5"/>
           </p:nvPr>
         </p:nvSpPr>
         <p:spPr/>
+        <p:txBody>
+          <a:bodyPr/>
+          <a:lstStyle/>
+          <a:p>
+            <a:endParaRPr lang="en-US"/>
+          </a:p>
+        </p:txBody>
       </p:sp>
     </p:spTree>
   </p:cSld>
@@ -920,7 +810,7 @@
 </file>
 
 <file path=ppt/notesSlides/notesSlide7.xml><?xml version="1.0" encoding="utf-8"?>
-<p:notes xmlns:a="http://schemas.openxmlformats.org/drawingml/2006/main" xmlns:p="http://schemas.openxmlformats.org/presentationml/2006/main" xmlns:r="http://schemas.openxmlformats.org/officeDocument/2006/relationships">
+<p:notes xmlns:a="http://schemas.openxmlformats.org/drawingml/2006/main" xmlns:r="http://schemas.openxmlformats.org/officeDocument/2006/relationships" xmlns:p="http://schemas.openxmlformats.org/presentationml/2006/main">
   <p:cSld>
     <p:spTree>
       <p:nvGrpSpPr>
@@ -940,13 +830,20 @@
         <p:nvSpPr>
           <p:cNvPr id="2" name="Slide Image Placeholder 1"/>
           <p:cNvSpPr>
-            <a:spLocks noGrp="1"/>
+            <a:spLocks noGrp="1" noRot="1" noChangeAspect="1"/>
           </p:cNvSpPr>
           <p:nvPr>
             <p:ph type="sldImg" idx="2"/>
           </p:nvPr>
         </p:nvSpPr>
         <p:spPr/>
+        <p:txBody>
+          <a:bodyPr/>
+          <a:lstStyle/>
+          <a:p>
+            <a:endParaRPr lang="en-US"/>
+          </a:p>
+        </p:txBody>
       </p:sp>
       <p:sp>
         <p:nvSpPr>
@@ -955,7 +852,7 @@
             <a:spLocks noGrp="1"/>
           </p:cNvSpPr>
           <p:nvPr>
-            <p:ph type="body" idx="3" sz="quarter"/>
+            <p:ph type="body" sz="quarter" idx="3"/>
           </p:nvPr>
         </p:nvSpPr>
         <p:spPr/>
@@ -967,7 +864,9 @@
               <a:t>The controlled scaling experiment now has two verified endpoints: 10 percent and 100 percent. The intermediate 25, 50, and 75 percent runs are still useful future work because they would reveal the shape of the accuracy-versus-compute curve, so I have not invented those points. The biggest lesson is that machine learning is not only about choosing a model. Dataset design, infrastructure, architecture correctness, computational cost, and evaluation all affect the final system. Next I would add augmentation, selective fine-tuning, compression, and eventually replace the occlusion proxy with real grasp-success labels.</a:t>
             </a:r>
           </a:p>
-          <a:p/>
+          <a:p>
+            <a:endParaRPr/>
+          </a:p>
           <a:p>
             <a:r>
               <a:t>Suggested time: ~52 seconds.</a:t>
@@ -982,10 +881,17 @@
             <a:spLocks noGrp="1"/>
           </p:cNvSpPr>
           <p:nvPr>
-            <p:ph type="sldNum" idx="5" sz="quarter"/>
+            <p:ph type="sldNum" sz="quarter" idx="5"/>
           </p:nvPr>
         </p:nvSpPr>
         <p:spPr/>
+        <p:txBody>
+          <a:bodyPr/>
+          <a:lstStyle/>
+          <a:p>
+            <a:endParaRPr lang="en-US"/>
+          </a:p>
+        </p:txBody>
       </p:sp>
     </p:spTree>
   </p:cSld>
@@ -1033,10 +939,9 @@
           <a:lstStyle/>
           <a:p>
             <a:r>
-              <a:rPr lang="en-US" smtClean="0"/>
+              <a:rPr lang="en-US"/>
               <a:t>Click to edit Master title style</a:t>
             </a:r>
-            <a:endParaRPr lang="en-US"/>
           </a:p>
         </p:txBody>
       </p:sp>
@@ -1152,10 +1057,9 @@
           </a:lstStyle>
           <a:p>
             <a:r>
-              <a:rPr lang="en-US" smtClean="0"/>
+              <a:rPr lang="en-US"/>
               <a:t>Click to edit Master subtitle style</a:t>
             </a:r>
-            <a:endParaRPr lang="en-US"/>
           </a:p>
         </p:txBody>
       </p:sp>
@@ -1176,7 +1080,7 @@
           <a:p>
             <a:fld id="{5BCAD085-E8A6-8845-BD4E-CB4CCA059FC4}" type="datetimeFigureOut">
               <a:rPr lang="en-US" smtClean="0"/>
-              <a:t>1/27/13</a:t>
+              <a:t>8/20/26</a:t>
             </a:fld>
             <a:endParaRPr lang="en-US"/>
           </a:p>
@@ -1270,10 +1174,9 @@
           <a:lstStyle/>
           <a:p>
             <a:r>
-              <a:rPr lang="en-US" smtClean="0"/>
+              <a:rPr lang="en-US"/>
               <a:t>Click to edit Master title style</a:t>
             </a:r>
-            <a:endParaRPr lang="en-US"/>
           </a:p>
         </p:txBody>
       </p:sp>
@@ -1294,38 +1197,37 @@
           <a:p>
             <a:pPr lvl="0"/>
             <a:r>
-              <a:rPr lang="en-US" smtClean="0"/>
+              <a:rPr lang="en-US"/>
               <a:t>Click to edit Master text styles</a:t>
             </a:r>
           </a:p>
           <a:p>
             <a:pPr lvl="1"/>
             <a:r>
-              <a:rPr lang="en-US" smtClean="0"/>
+              <a:rPr lang="en-US"/>
               <a:t>Second level</a:t>
             </a:r>
           </a:p>
           <a:p>
             <a:pPr lvl="2"/>
             <a:r>
-              <a:rPr lang="en-US" smtClean="0"/>
+              <a:rPr lang="en-US"/>
               <a:t>Third level</a:t>
             </a:r>
           </a:p>
           <a:p>
             <a:pPr lvl="3"/>
             <a:r>
-              <a:rPr lang="en-US" smtClean="0"/>
+              <a:rPr lang="en-US"/>
               <a:t>Fourth level</a:t>
             </a:r>
           </a:p>
           <a:p>
             <a:pPr lvl="4"/>
             <a:r>
-              <a:rPr lang="en-US" smtClean="0"/>
+              <a:rPr lang="en-US"/>
               <a:t>Fifth level</a:t>
             </a:r>
-            <a:endParaRPr lang="en-US"/>
           </a:p>
         </p:txBody>
       </p:sp>
@@ -1346,7 +1248,7 @@
           <a:p>
             <a:fld id="{5BCAD085-E8A6-8845-BD4E-CB4CCA059FC4}" type="datetimeFigureOut">
               <a:rPr lang="en-US" smtClean="0"/>
-              <a:t>1/27/13</a:t>
+              <a:t>8/20/26</a:t>
             </a:fld>
             <a:endParaRPr lang="en-US"/>
           </a:p>
@@ -1445,10 +1347,9 @@
           <a:lstStyle/>
           <a:p>
             <a:r>
-              <a:rPr lang="en-US" smtClean="0"/>
+              <a:rPr lang="en-US"/>
               <a:t>Click to edit Master title style</a:t>
             </a:r>
-            <a:endParaRPr lang="en-US"/>
           </a:p>
         </p:txBody>
       </p:sp>
@@ -1474,38 +1375,37 @@
           <a:p>
             <a:pPr lvl="0"/>
             <a:r>
-              <a:rPr lang="en-US" smtClean="0"/>
+              <a:rPr lang="en-US"/>
               <a:t>Click to edit Master text styles</a:t>
             </a:r>
           </a:p>
           <a:p>
             <a:pPr lvl="1"/>
             <a:r>
-              <a:rPr lang="en-US" smtClean="0"/>
+              <a:rPr lang="en-US"/>
               <a:t>Second level</a:t>
             </a:r>
           </a:p>
           <a:p>
             <a:pPr lvl="2"/>
             <a:r>
-              <a:rPr lang="en-US" smtClean="0"/>
+              <a:rPr lang="en-US"/>
               <a:t>Third level</a:t>
             </a:r>
           </a:p>
           <a:p>
             <a:pPr lvl="3"/>
             <a:r>
-              <a:rPr lang="en-US" smtClean="0"/>
+              <a:rPr lang="en-US"/>
               <a:t>Fourth level</a:t>
             </a:r>
           </a:p>
           <a:p>
             <a:pPr lvl="4"/>
             <a:r>
-              <a:rPr lang="en-US" smtClean="0"/>
+              <a:rPr lang="en-US"/>
               <a:t>Fifth level</a:t>
             </a:r>
-            <a:endParaRPr lang="en-US"/>
           </a:p>
         </p:txBody>
       </p:sp>
@@ -1526,7 +1426,7 @@
           <a:p>
             <a:fld id="{5BCAD085-E8A6-8845-BD4E-CB4CCA059FC4}" type="datetimeFigureOut">
               <a:rPr lang="en-US" smtClean="0"/>
-              <a:t>1/27/13</a:t>
+              <a:t>8/20/26</a:t>
             </a:fld>
             <a:endParaRPr lang="en-US"/>
           </a:p>
@@ -1620,10 +1520,9 @@
           <a:lstStyle/>
           <a:p>
             <a:r>
-              <a:rPr lang="en-US" smtClean="0"/>
+              <a:rPr lang="en-US"/>
               <a:t>Click to edit Master title style</a:t>
             </a:r>
-            <a:endParaRPr lang="en-US"/>
           </a:p>
         </p:txBody>
       </p:sp>
@@ -1644,38 +1543,37 @@
           <a:p>
             <a:pPr lvl="0"/>
             <a:r>
-              <a:rPr lang="en-US" smtClean="0"/>
+              <a:rPr lang="en-US"/>
               <a:t>Click to edit Master text styles</a:t>
             </a:r>
           </a:p>
           <a:p>
             <a:pPr lvl="1"/>
             <a:r>
-              <a:rPr lang="en-US" smtClean="0"/>
+              <a:rPr lang="en-US"/>
               <a:t>Second level</a:t>
             </a:r>
           </a:p>
           <a:p>
             <a:pPr lvl="2"/>
             <a:r>
-              <a:rPr lang="en-US" smtClean="0"/>
+              <a:rPr lang="en-US"/>
               <a:t>Third level</a:t>
             </a:r>
           </a:p>
           <a:p>
             <a:pPr lvl="3"/>
             <a:r>
-              <a:rPr lang="en-US" smtClean="0"/>
+              <a:rPr lang="en-US"/>
               <a:t>Fourth level</a:t>
             </a:r>
           </a:p>
           <a:p>
             <a:pPr lvl="4"/>
             <a:r>
-              <a:rPr lang="en-US" smtClean="0"/>
+              <a:rPr lang="en-US"/>
               <a:t>Fifth level</a:t>
             </a:r>
-            <a:endParaRPr lang="en-US"/>
           </a:p>
         </p:txBody>
       </p:sp>
@@ -1696,7 +1594,7 @@
           <a:p>
             <a:fld id="{5BCAD085-E8A6-8845-BD4E-CB4CCA059FC4}" type="datetimeFigureOut">
               <a:rPr lang="en-US" smtClean="0"/>
-              <a:t>1/27/13</a:t>
+              <a:t>8/20/26</a:t>
             </a:fld>
             <a:endParaRPr lang="en-US"/>
           </a:p>
@@ -1799,10 +1697,9 @@
           </a:lstStyle>
           <a:p>
             <a:r>
-              <a:rPr lang="en-US" smtClean="0"/>
+              <a:rPr lang="en-US"/>
               <a:t>Click to edit Master title style</a:t>
             </a:r>
-            <a:endParaRPr lang="en-US"/>
           </a:p>
         </p:txBody>
       </p:sp>
@@ -1919,7 +1816,7 @@
           <a:p>
             <a:pPr lvl="0"/>
             <a:r>
-              <a:rPr lang="en-US" smtClean="0"/>
+              <a:rPr lang="en-US"/>
               <a:t>Click to edit Master text styles</a:t>
             </a:r>
           </a:p>
@@ -1942,7 +1839,7 @@
           <a:p>
             <a:fld id="{5BCAD085-E8A6-8845-BD4E-CB4CCA059FC4}" type="datetimeFigureOut">
               <a:rPr lang="en-US" smtClean="0"/>
-              <a:t>1/27/13</a:t>
+              <a:t>8/20/26</a:t>
             </a:fld>
             <a:endParaRPr lang="en-US"/>
           </a:p>
@@ -2036,10 +1933,9 @@
           <a:lstStyle/>
           <a:p>
             <a:r>
-              <a:rPr lang="en-US" smtClean="0"/>
+              <a:rPr lang="en-US"/>
               <a:t>Click to edit Master title style</a:t>
             </a:r>
-            <a:endParaRPr lang="en-US"/>
           </a:p>
         </p:txBody>
       </p:sp>
@@ -2093,38 +1989,37 @@
           <a:p>
             <a:pPr lvl="0"/>
             <a:r>
-              <a:rPr lang="en-US" smtClean="0"/>
+              <a:rPr lang="en-US"/>
               <a:t>Click to edit Master text styles</a:t>
             </a:r>
           </a:p>
           <a:p>
             <a:pPr lvl="1"/>
             <a:r>
-              <a:rPr lang="en-US" smtClean="0"/>
+              <a:rPr lang="en-US"/>
               <a:t>Second level</a:t>
             </a:r>
           </a:p>
           <a:p>
             <a:pPr lvl="2"/>
             <a:r>
-              <a:rPr lang="en-US" smtClean="0"/>
+              <a:rPr lang="en-US"/>
               <a:t>Third level</a:t>
             </a:r>
           </a:p>
           <a:p>
             <a:pPr lvl="3"/>
             <a:r>
-              <a:rPr lang="en-US" smtClean="0"/>
+              <a:rPr lang="en-US"/>
               <a:t>Fourth level</a:t>
             </a:r>
           </a:p>
           <a:p>
             <a:pPr lvl="4"/>
             <a:r>
-              <a:rPr lang="en-US" smtClean="0"/>
+              <a:rPr lang="en-US"/>
               <a:t>Fifth level</a:t>
             </a:r>
-            <a:endParaRPr lang="en-US"/>
           </a:p>
         </p:txBody>
       </p:sp>
@@ -2178,38 +2073,37 @@
           <a:p>
             <a:pPr lvl="0"/>
             <a:r>
-              <a:rPr lang="en-US" smtClean="0"/>
+              <a:rPr lang="en-US"/>
               <a:t>Click to edit Master text styles</a:t>
             </a:r>
           </a:p>
           <a:p>
             <a:pPr lvl="1"/>
             <a:r>
-              <a:rPr lang="en-US" smtClean="0"/>
+              <a:rPr lang="en-US"/>
               <a:t>Second level</a:t>
             </a:r>
           </a:p>
           <a:p>
             <a:pPr lvl="2"/>
             <a:r>
-              <a:rPr lang="en-US" smtClean="0"/>
+              <a:rPr lang="en-US"/>
               <a:t>Third level</a:t>
             </a:r>
           </a:p>
           <a:p>
             <a:pPr lvl="3"/>
             <a:r>
-              <a:rPr lang="en-US" smtClean="0"/>
+              <a:rPr lang="en-US"/>
               <a:t>Fourth level</a:t>
             </a:r>
           </a:p>
           <a:p>
             <a:pPr lvl="4"/>
             <a:r>
-              <a:rPr lang="en-US" smtClean="0"/>
+              <a:rPr lang="en-US"/>
               <a:t>Fifth level</a:t>
             </a:r>
-            <a:endParaRPr lang="en-US"/>
           </a:p>
         </p:txBody>
       </p:sp>
@@ -2230,7 +2124,7 @@
           <a:p>
             <a:fld id="{5BCAD085-E8A6-8845-BD4E-CB4CCA059FC4}" type="datetimeFigureOut">
               <a:rPr lang="en-US" smtClean="0"/>
-              <a:t>1/27/13</a:t>
+              <a:t>8/20/26</a:t>
             </a:fld>
             <a:endParaRPr lang="en-US"/>
           </a:p>
@@ -2328,10 +2222,9 @@
           </a:lstStyle>
           <a:p>
             <a:r>
-              <a:rPr lang="en-US" smtClean="0"/>
+              <a:rPr lang="en-US"/>
               <a:t>Click to edit Master title style</a:t>
             </a:r>
-            <a:endParaRPr lang="en-US"/>
           </a:p>
         </p:txBody>
       </p:sp>
@@ -2394,7 +2287,7 @@
           <a:p>
             <a:pPr lvl="0"/>
             <a:r>
-              <a:rPr lang="en-US" smtClean="0"/>
+              <a:rPr lang="en-US"/>
               <a:t>Click to edit Master text styles</a:t>
             </a:r>
           </a:p>
@@ -2450,38 +2343,37 @@
           <a:p>
             <a:pPr lvl="0"/>
             <a:r>
-              <a:rPr lang="en-US" smtClean="0"/>
+              <a:rPr lang="en-US"/>
               <a:t>Click to edit Master text styles</a:t>
             </a:r>
           </a:p>
           <a:p>
             <a:pPr lvl="1"/>
             <a:r>
-              <a:rPr lang="en-US" smtClean="0"/>
+              <a:rPr lang="en-US"/>
               <a:t>Second level</a:t>
             </a:r>
           </a:p>
           <a:p>
             <a:pPr lvl="2"/>
             <a:r>
-              <a:rPr lang="en-US" smtClean="0"/>
+              <a:rPr lang="en-US"/>
               <a:t>Third level</a:t>
             </a:r>
           </a:p>
           <a:p>
             <a:pPr lvl="3"/>
             <a:r>
-              <a:rPr lang="en-US" smtClean="0"/>
+              <a:rPr lang="en-US"/>
               <a:t>Fourth level</a:t>
             </a:r>
           </a:p>
           <a:p>
             <a:pPr lvl="4"/>
             <a:r>
-              <a:rPr lang="en-US" smtClean="0"/>
+              <a:rPr lang="en-US"/>
               <a:t>Fifth level</a:t>
             </a:r>
-            <a:endParaRPr lang="en-US"/>
           </a:p>
         </p:txBody>
       </p:sp>
@@ -2544,7 +2436,7 @@
           <a:p>
             <a:pPr lvl="0"/>
             <a:r>
-              <a:rPr lang="en-US" smtClean="0"/>
+              <a:rPr lang="en-US"/>
               <a:t>Click to edit Master text styles</a:t>
             </a:r>
           </a:p>
@@ -2600,38 +2492,37 @@
           <a:p>
             <a:pPr lvl="0"/>
             <a:r>
-              <a:rPr lang="en-US" smtClean="0"/>
+              <a:rPr lang="en-US"/>
               <a:t>Click to edit Master text styles</a:t>
             </a:r>
           </a:p>
           <a:p>
             <a:pPr lvl="1"/>
             <a:r>
-              <a:rPr lang="en-US" smtClean="0"/>
+              <a:rPr lang="en-US"/>
               <a:t>Second level</a:t>
             </a:r>
           </a:p>
           <a:p>
             <a:pPr lvl="2"/>
             <a:r>
-              <a:rPr lang="en-US" smtClean="0"/>
+              <a:rPr lang="en-US"/>
               <a:t>Third level</a:t>
             </a:r>
           </a:p>
           <a:p>
             <a:pPr lvl="3"/>
             <a:r>
-              <a:rPr lang="en-US" smtClean="0"/>
+              <a:rPr lang="en-US"/>
               <a:t>Fourth level</a:t>
             </a:r>
           </a:p>
           <a:p>
             <a:pPr lvl="4"/>
             <a:r>
-              <a:rPr lang="en-US" smtClean="0"/>
+              <a:rPr lang="en-US"/>
               <a:t>Fifth level</a:t>
             </a:r>
-            <a:endParaRPr lang="en-US"/>
           </a:p>
         </p:txBody>
       </p:sp>
@@ -2652,7 +2543,7 @@
           <a:p>
             <a:fld id="{5BCAD085-E8A6-8845-BD4E-CB4CCA059FC4}" type="datetimeFigureOut">
               <a:rPr lang="en-US" smtClean="0"/>
-              <a:t>1/27/13</a:t>
+              <a:t>8/20/26</a:t>
             </a:fld>
             <a:endParaRPr lang="en-US"/>
           </a:p>
@@ -2746,10 +2637,9 @@
           <a:lstStyle/>
           <a:p>
             <a:r>
-              <a:rPr lang="en-US" smtClean="0"/>
+              <a:rPr lang="en-US"/>
               <a:t>Click to edit Master title style</a:t>
             </a:r>
-            <a:endParaRPr lang="en-US"/>
           </a:p>
         </p:txBody>
       </p:sp>
@@ -2770,7 +2660,7 @@
           <a:p>
             <a:fld id="{5BCAD085-E8A6-8845-BD4E-CB4CCA059FC4}" type="datetimeFigureOut">
               <a:rPr lang="en-US" smtClean="0"/>
-              <a:t>1/27/13</a:t>
+              <a:t>8/20/26</a:t>
             </a:fld>
             <a:endParaRPr lang="en-US"/>
           </a:p>
@@ -2865,7 +2755,7 @@
           <a:p>
             <a:fld id="{5BCAD085-E8A6-8845-BD4E-CB4CCA059FC4}" type="datetimeFigureOut">
               <a:rPr lang="en-US" smtClean="0"/>
-              <a:t>1/27/13</a:t>
+              <a:t>8/20/26</a:t>
             </a:fld>
             <a:endParaRPr lang="en-US"/>
           </a:p>
@@ -2968,10 +2858,9 @@
           </a:lstStyle>
           <a:p>
             <a:r>
-              <a:rPr lang="en-US" smtClean="0"/>
+              <a:rPr lang="en-US"/>
               <a:t>Click to edit Master title style</a:t>
             </a:r>
-            <a:endParaRPr lang="en-US"/>
           </a:p>
         </p:txBody>
       </p:sp>
@@ -3025,38 +2914,37 @@
           <a:p>
             <a:pPr lvl="0"/>
             <a:r>
-              <a:rPr lang="en-US" smtClean="0"/>
+              <a:rPr lang="en-US"/>
               <a:t>Click to edit Master text styles</a:t>
             </a:r>
           </a:p>
           <a:p>
             <a:pPr lvl="1"/>
             <a:r>
-              <a:rPr lang="en-US" smtClean="0"/>
+              <a:rPr lang="en-US"/>
               <a:t>Second level</a:t>
             </a:r>
           </a:p>
           <a:p>
             <a:pPr lvl="2"/>
             <a:r>
-              <a:rPr lang="en-US" smtClean="0"/>
+              <a:rPr lang="en-US"/>
               <a:t>Third level</a:t>
             </a:r>
           </a:p>
           <a:p>
             <a:pPr lvl="3"/>
             <a:r>
-              <a:rPr lang="en-US" smtClean="0"/>
+              <a:rPr lang="en-US"/>
               <a:t>Fourth level</a:t>
             </a:r>
           </a:p>
           <a:p>
             <a:pPr lvl="4"/>
             <a:r>
-              <a:rPr lang="en-US" smtClean="0"/>
+              <a:rPr lang="en-US"/>
               <a:t>Fifth level</a:t>
             </a:r>
-            <a:endParaRPr lang="en-US"/>
           </a:p>
         </p:txBody>
       </p:sp>
@@ -3119,7 +3007,7 @@
           <a:p>
             <a:pPr lvl="0"/>
             <a:r>
-              <a:rPr lang="en-US" smtClean="0"/>
+              <a:rPr lang="en-US"/>
               <a:t>Click to edit Master text styles</a:t>
             </a:r>
           </a:p>
@@ -3142,7 +3030,7 @@
           <a:p>
             <a:fld id="{5BCAD085-E8A6-8845-BD4E-CB4CCA059FC4}" type="datetimeFigureOut">
               <a:rPr lang="en-US" smtClean="0"/>
-              <a:t>1/27/13</a:t>
+              <a:t>8/20/26</a:t>
             </a:fld>
             <a:endParaRPr lang="en-US"/>
           </a:p>
@@ -3245,10 +3133,9 @@
           </a:lstStyle>
           <a:p>
             <a:r>
-              <a:rPr lang="en-US" smtClean="0"/>
+              <a:rPr lang="en-US"/>
               <a:t>Click to edit Master title style</a:t>
             </a:r>
-            <a:endParaRPr lang="en-US"/>
           </a:p>
         </p:txBody>
       </p:sp>
@@ -3372,7 +3259,7 @@
           <a:p>
             <a:pPr lvl="0"/>
             <a:r>
-              <a:rPr lang="en-US" smtClean="0"/>
+              <a:rPr lang="en-US"/>
               <a:t>Click to edit Master text styles</a:t>
             </a:r>
           </a:p>
@@ -3395,7 +3282,7 @@
           <a:p>
             <a:fld id="{5BCAD085-E8A6-8845-BD4E-CB4CCA059FC4}" type="datetimeFigureOut">
               <a:rPr lang="en-US" smtClean="0"/>
-              <a:t>1/27/13</a:t>
+              <a:t>8/20/26</a:t>
             </a:fld>
             <a:endParaRPr lang="en-US"/>
           </a:p>
@@ -3504,10 +3391,9 @@
           <a:lstStyle/>
           <a:p>
             <a:r>
-              <a:rPr lang="en-US" smtClean="0"/>
+              <a:rPr lang="en-US"/>
               <a:t>Click to edit Master title style</a:t>
             </a:r>
-            <a:endParaRPr lang="en-US"/>
           </a:p>
         </p:txBody>
       </p:sp>
@@ -3538,38 +3424,37 @@
           <a:p>
             <a:pPr lvl="0"/>
             <a:r>
-              <a:rPr lang="en-US" smtClean="0"/>
+              <a:rPr lang="en-US"/>
               <a:t>Click to edit Master text styles</a:t>
             </a:r>
           </a:p>
           <a:p>
             <a:pPr lvl="1"/>
             <a:r>
-              <a:rPr lang="en-US" smtClean="0"/>
+              <a:rPr lang="en-US"/>
               <a:t>Second level</a:t>
             </a:r>
           </a:p>
           <a:p>
             <a:pPr lvl="2"/>
             <a:r>
-              <a:rPr lang="en-US" smtClean="0"/>
+              <a:rPr lang="en-US"/>
               <a:t>Third level</a:t>
             </a:r>
           </a:p>
           <a:p>
             <a:pPr lvl="3"/>
             <a:r>
-              <a:rPr lang="en-US" smtClean="0"/>
+              <a:rPr lang="en-US"/>
               <a:t>Fourth level</a:t>
             </a:r>
           </a:p>
           <a:p>
             <a:pPr lvl="4"/>
             <a:r>
-              <a:rPr lang="en-US" smtClean="0"/>
+              <a:rPr lang="en-US"/>
               <a:t>Fifth level</a:t>
             </a:r>
-            <a:endParaRPr lang="en-US"/>
           </a:p>
         </p:txBody>
       </p:sp>
@@ -3608,7 +3493,7 @@
           <a:p>
             <a:fld id="{5BCAD085-E8A6-8845-BD4E-CB4CCA059FC4}" type="datetimeFigureOut">
               <a:rPr lang="en-US" smtClean="0"/>
-              <a:t>1/27/13</a:t>
+              <a:t>8/20/26</a:t>
             </a:fld>
             <a:endParaRPr lang="en-US"/>
           </a:p>
@@ -3967,7 +3852,7 @@
 </file>
 
 <file path=ppt/slides/slide1.xml><?xml version="1.0" encoding="utf-8"?>
-<p:sld xmlns:a="http://schemas.openxmlformats.org/drawingml/2006/main" xmlns:p="http://schemas.openxmlformats.org/presentationml/2006/main" xmlns:r="http://schemas.openxmlformats.org/officeDocument/2006/relationships">
+<p:sld xmlns:a="http://schemas.openxmlformats.org/drawingml/2006/main" xmlns:r="http://schemas.openxmlformats.org/officeDocument/2006/relationships" xmlns:p="http://schemas.openxmlformats.org/presentationml/2006/main">
   <p:cSld>
     <p:bg>
       <p:bgPr>
@@ -3983,7 +3868,14 @@
         <p:cNvGrpSpPr/>
         <p:nvPr/>
       </p:nvGrpSpPr>
-      <p:grpSpPr/>
+      <p:grpSpPr>
+        <a:xfrm>
+          <a:off x="0" y="0"/>
+          <a:ext cx="0" cy="0"/>
+          <a:chOff x="0" y="0"/>
+          <a:chExt cx="0" cy="0"/>
+        </a:xfrm>
+      </p:grpSpPr>
       <p:sp>
         <p:nvSpPr>
           <p:cNvPr id="2" name="TextBox 1"/>
@@ -4167,6 +4059,7 @@
           <a:lstStyle/>
           <a:p>
             <a:pPr algn="ctr"/>
+            <a:endParaRPr/>
           </a:p>
         </p:txBody>
       </p:sp>
@@ -4245,6 +4138,7 @@
           <a:lstStyle/>
           <a:p>
             <a:pPr algn="ctr"/>
+            <a:endParaRPr/>
           </a:p>
         </p:txBody>
       </p:sp>
@@ -4290,6 +4184,7 @@
           <a:lstStyle/>
           <a:p>
             <a:pPr algn="ctr"/>
+            <a:endParaRPr/>
           </a:p>
         </p:txBody>
       </p:sp>
@@ -4368,6 +4263,7 @@
           <a:lstStyle/>
           <a:p>
             <a:pPr algn="ctr"/>
+            <a:endParaRPr/>
           </a:p>
         </p:txBody>
       </p:sp>
@@ -4413,6 +4309,7 @@
           <a:lstStyle/>
           <a:p>
             <a:pPr algn="ctr"/>
+            <a:endParaRPr/>
           </a:p>
         </p:txBody>
       </p:sp>
@@ -4600,7 +4497,7 @@
 </file>
 
 <file path=ppt/slides/slide2.xml><?xml version="1.0" encoding="utf-8"?>
-<p:sld xmlns:a="http://schemas.openxmlformats.org/drawingml/2006/main" xmlns:p="http://schemas.openxmlformats.org/presentationml/2006/main" xmlns:r="http://schemas.openxmlformats.org/officeDocument/2006/relationships">
+<p:sld xmlns:a="http://schemas.openxmlformats.org/drawingml/2006/main" xmlns:r="http://schemas.openxmlformats.org/officeDocument/2006/relationships" xmlns:p="http://schemas.openxmlformats.org/presentationml/2006/main">
   <p:cSld>
     <p:bg>
       <p:bgPr>
@@ -4616,7 +4513,14 @@
         <p:cNvGrpSpPr/>
         <p:nvPr/>
       </p:nvGrpSpPr>
-      <p:grpSpPr/>
+      <p:grpSpPr>
+        <a:xfrm>
+          <a:off x="0" y="0"/>
+          <a:ext cx="0" cy="0"/>
+          <a:chOff x="0" y="0"/>
+          <a:chExt cx="0" cy="0"/>
+        </a:xfrm>
+      </p:grpSpPr>
       <p:sp>
         <p:nvSpPr>
           <p:cNvPr id="2" name="TextBox 1"/>
@@ -4762,6 +4666,7 @@
           <a:lstStyle/>
           <a:p>
             <a:pPr algn="ctr"/>
+            <a:endParaRPr/>
           </a:p>
         </p:txBody>
       </p:sp>
@@ -4807,6 +4712,7 @@
           <a:lstStyle/>
           <a:p>
             <a:pPr algn="ctr"/>
+            <a:endParaRPr/>
           </a:p>
         </p:txBody>
       </p:sp>
@@ -4819,7 +4725,7 @@
           <p:nvPr/>
         </p:nvPicPr>
         <p:blipFill>
-          <a:blip r:embed="rId2"/>
+          <a:blip r:embed="rId3"/>
           <a:srcRect t="7933" b="7933"/>
           <a:stretch>
             <a:fillRect/>
@@ -4947,6 +4853,7 @@
           <a:lstStyle/>
           <a:p>
             <a:pPr algn="ctr"/>
+            <a:endParaRPr/>
           </a:p>
         </p:txBody>
       </p:sp>
@@ -4959,7 +4866,7 @@
           <p:nvPr/>
         </p:nvPicPr>
         <p:blipFill>
-          <a:blip r:embed="rId3"/>
+          <a:blip r:embed="rId4"/>
           <a:srcRect t="7933" b="7933"/>
           <a:stretch>
             <a:fillRect/>
@@ -5087,6 +4994,7 @@
           <a:lstStyle/>
           <a:p>
             <a:pPr algn="ctr"/>
+            <a:endParaRPr/>
           </a:p>
         </p:txBody>
       </p:sp>
@@ -5099,7 +5007,7 @@
           <p:nvPr/>
         </p:nvPicPr>
         <p:blipFill>
-          <a:blip r:embed="rId4"/>
+          <a:blip r:embed="rId5"/>
           <a:srcRect t="7933" b="7933"/>
           <a:stretch>
             <a:fillRect/>
@@ -5262,6 +5170,7 @@
           <a:lstStyle/>
           <a:p>
             <a:pPr algn="ctr"/>
+            <a:endParaRPr/>
           </a:p>
         </p:txBody>
       </p:sp>
@@ -5377,6 +5286,7 @@
           <a:lstStyle/>
           <a:p>
             <a:pPr algn="ctr"/>
+            <a:endParaRPr/>
           </a:p>
         </p:txBody>
       </p:sp>
@@ -5529,7 +5439,7 @@
 </file>
 
 <file path=ppt/slides/slide3.xml><?xml version="1.0" encoding="utf-8"?>
-<p:sld xmlns:a="http://schemas.openxmlformats.org/drawingml/2006/main" xmlns:p="http://schemas.openxmlformats.org/presentationml/2006/main" xmlns:r="http://schemas.openxmlformats.org/officeDocument/2006/relationships">
+<p:sld xmlns:a="http://schemas.openxmlformats.org/drawingml/2006/main" xmlns:r="http://schemas.openxmlformats.org/officeDocument/2006/relationships" xmlns:p="http://schemas.openxmlformats.org/presentationml/2006/main">
   <p:cSld>
     <p:bg>
       <p:bgPr>
@@ -5545,7 +5455,14 @@
         <p:cNvGrpSpPr/>
         <p:nvPr/>
       </p:nvGrpSpPr>
-      <p:grpSpPr/>
+      <p:grpSpPr>
+        <a:xfrm>
+          <a:off x="0" y="0"/>
+          <a:ext cx="0" cy="0"/>
+          <a:chOff x="0" y="0"/>
+          <a:chExt cx="0" cy="0"/>
+        </a:xfrm>
+      </p:grpSpPr>
       <p:sp>
         <p:nvSpPr>
           <p:cNvPr id="2" name="TextBox 1"/>
@@ -5691,6 +5608,7 @@
           <a:lstStyle/>
           <a:p>
             <a:pPr algn="ctr"/>
+            <a:endParaRPr/>
           </a:p>
         </p:txBody>
       </p:sp>
@@ -5736,6 +5654,7 @@
           <a:lstStyle/>
           <a:p>
             <a:pPr algn="ctr"/>
+            <a:endParaRPr/>
           </a:p>
         </p:txBody>
       </p:sp>
@@ -5799,7 +5718,7 @@
         </p:nvSpPr>
         <p:spPr>
           <a:xfrm>
-            <a:off x="676656" y="2596896"/>
+            <a:off x="676656" y="2616673"/>
             <a:ext cx="1645920" cy="310896"/>
           </a:xfrm>
           <a:prstGeom prst="rect">
@@ -5815,7 +5734,7 @@
           <a:p>
             <a:pPr algn="l"/>
             <a:r>
-              <a:rPr sz="1400" b="1">
+              <a:rPr sz="1400" b="1" dirty="0">
                 <a:solidFill>
                   <a:srgbClr val="0F172A"/>
                 </a:solidFill>
@@ -5834,7 +5753,7 @@
         </p:nvSpPr>
         <p:spPr>
           <a:xfrm>
-            <a:off x="676656" y="3127248"/>
+            <a:off x="722376" y="3140964"/>
             <a:ext cx="1627632" cy="1417320"/>
           </a:xfrm>
           <a:prstGeom prst="rect">
@@ -5843,7 +5762,7 @@
           <a:noFill/>
         </p:spPr>
         <p:txBody>
-          <a:bodyPr wrap="square" lIns="73152" rIns="73152" tIns="36576" bIns="36576">
+          <a:bodyPr wrap="square" lIns="73152" tIns="36576" rIns="73152" bIns="36576">
             <a:spAutoFit/>
           </a:bodyPr>
           <a:lstStyle/>
@@ -5860,8 +5779,14 @@
               </a:defRPr>
             </a:pPr>
             <a:r>
-              <a:t>•  OpenLORIS</a:t>
-            </a:r>
+              <a:rPr dirty="0"/>
+              <a:t>•  </a:t>
+            </a:r>
+            <a:r>
+              <a:rPr dirty="0" err="1"/>
+              <a:t>OpenLORIS</a:t>
+            </a:r>
+            <a:endParaRPr dirty="0"/>
           </a:p>
           <a:p>
             <a:pPr>
@@ -5876,6 +5801,7 @@
               </a:defRPr>
             </a:pPr>
             <a:r>
+              <a:rPr dirty="0"/>
               <a:t>•  Google Drive</a:t>
             </a:r>
           </a:p>
@@ -5892,6 +5818,7 @@
               </a:defRPr>
             </a:pPr>
             <a:r>
+              <a:rPr dirty="0"/>
               <a:t>•  Class labels</a:t>
             </a:r>
           </a:p>
@@ -5937,6 +5864,7 @@
           <a:lstStyle/>
           <a:p>
             <a:pPr algn="ctr"/>
+            <a:endParaRPr/>
           </a:p>
         </p:txBody>
       </p:sp>
@@ -5982,6 +5910,7 @@
           <a:lstStyle/>
           <a:p>
             <a:pPr algn="ctr"/>
+            <a:endParaRPr/>
           </a:p>
         </p:txBody>
       </p:sp>
@@ -6061,7 +5990,7 @@
           <a:p>
             <a:pPr algn="l"/>
             <a:r>
-              <a:rPr sz="1400" b="1">
+              <a:rPr sz="1400" b="1" dirty="0">
                 <a:solidFill>
                   <a:srgbClr val="0F172A"/>
                 </a:solidFill>
@@ -6089,7 +6018,7 @@
           <a:noFill/>
         </p:spPr>
         <p:txBody>
-          <a:bodyPr wrap="square" lIns="73152" rIns="73152" tIns="36576" bIns="36576">
+          <a:bodyPr wrap="square" lIns="73152" tIns="36576" rIns="73152" bIns="36576">
             <a:spAutoFit/>
           </a:bodyPr>
           <a:lstStyle/>
@@ -6106,8 +6035,14 @@
               </a:defRPr>
             </a:pPr>
             <a:r>
-              <a:t>•  ImageFolder</a:t>
-            </a:r>
+              <a:rPr dirty="0"/>
+              <a:t>•  </a:t>
+            </a:r>
+            <a:r>
+              <a:rPr dirty="0" err="1"/>
+              <a:t>ImageFolder</a:t>
+            </a:r>
+            <a:endParaRPr dirty="0"/>
           </a:p>
           <a:p>
             <a:pPr>
@@ -6122,8 +6057,14 @@
               </a:defRPr>
             </a:pPr>
             <a:r>
-              <a:t>•  DataLoader</a:t>
-            </a:r>
+              <a:rPr dirty="0"/>
+              <a:t>•  </a:t>
+            </a:r>
+            <a:r>
+              <a:rPr dirty="0" err="1"/>
+              <a:t>DataLoader</a:t>
+            </a:r>
+            <a:endParaRPr dirty="0"/>
           </a:p>
           <a:p>
             <a:pPr>
@@ -6138,6 +6079,7 @@
               </a:defRPr>
             </a:pPr>
             <a:r>
+              <a:rPr dirty="0"/>
               <a:t>•  Batching</a:t>
             </a:r>
           </a:p>
@@ -6183,6 +6125,7 @@
           <a:lstStyle/>
           <a:p>
             <a:pPr algn="ctr"/>
+            <a:endParaRPr/>
           </a:p>
         </p:txBody>
       </p:sp>
@@ -6228,6 +6171,7 @@
           <a:lstStyle/>
           <a:p>
             <a:pPr algn="ctr"/>
+            <a:endParaRPr/>
           </a:p>
         </p:txBody>
       </p:sp>
@@ -6307,7 +6251,7 @@
           <a:p>
             <a:pPr algn="l"/>
             <a:r>
-              <a:rPr sz="1400" b="1">
+              <a:rPr sz="1400" b="1" dirty="0">
                 <a:solidFill>
                   <a:srgbClr val="0F172A"/>
                 </a:solidFill>
@@ -6335,7 +6279,7 @@
           <a:noFill/>
         </p:spPr>
         <p:txBody>
-          <a:bodyPr wrap="square" lIns="73152" rIns="73152" tIns="36576" bIns="36576">
+          <a:bodyPr wrap="square" lIns="73152" tIns="36576" rIns="73152" bIns="36576">
             <a:spAutoFit/>
           </a:bodyPr>
           <a:lstStyle/>
@@ -6352,6 +6296,7 @@
               </a:defRPr>
             </a:pPr>
             <a:r>
+              <a:rPr dirty="0"/>
               <a:t>•  ViT from scratch</a:t>
             </a:r>
           </a:p>
@@ -6368,6 +6313,7 @@
               </a:defRPr>
             </a:pPr>
             <a:r>
+              <a:rPr dirty="0"/>
               <a:t>•  Pretrained ViT</a:t>
             </a:r>
           </a:p>
@@ -6384,6 +6330,7 @@
               </a:defRPr>
             </a:pPr>
             <a:r>
+              <a:rPr dirty="0"/>
               <a:t>•  3-class head</a:t>
             </a:r>
           </a:p>
@@ -6429,6 +6376,7 @@
           <a:lstStyle/>
           <a:p>
             <a:pPr algn="ctr"/>
+            <a:endParaRPr/>
           </a:p>
         </p:txBody>
       </p:sp>
@@ -6474,6 +6422,7 @@
           <a:lstStyle/>
           <a:p>
             <a:pPr algn="ctr"/>
+            <a:endParaRPr/>
           </a:p>
         </p:txBody>
       </p:sp>
@@ -6518,7 +6467,7 @@
           <a:p>
             <a:pPr algn="ctr"/>
             <a:r>
-              <a:rPr sz="1200" b="1">
+              <a:rPr sz="1200" b="1" dirty="0">
                 <a:solidFill>
                   <a:srgbClr val="FFFFFF"/>
                 </a:solidFill>
@@ -6553,7 +6502,7 @@
           <a:p>
             <a:pPr algn="l"/>
             <a:r>
-              <a:rPr sz="1400" b="1">
+              <a:rPr sz="1400" b="1" dirty="0">
                 <a:solidFill>
                   <a:srgbClr val="0F172A"/>
                 </a:solidFill>
@@ -6581,7 +6530,7 @@
           <a:noFill/>
         </p:spPr>
         <p:txBody>
-          <a:bodyPr wrap="square" lIns="73152" rIns="73152" tIns="36576" bIns="36576">
+          <a:bodyPr wrap="square" lIns="73152" tIns="36576" rIns="73152" bIns="36576">
             <a:spAutoFit/>
           </a:bodyPr>
           <a:lstStyle/>
@@ -6598,6 +6547,7 @@
               </a:defRPr>
             </a:pPr>
             <a:r>
+              <a:rPr dirty="0"/>
               <a:t>•  Cross entropy</a:t>
             </a:r>
           </a:p>
@@ -6614,8 +6564,14 @@
               </a:defRPr>
             </a:pPr>
             <a:r>
-              <a:t>•  AdamW</a:t>
-            </a:r>
+              <a:rPr dirty="0"/>
+              <a:t>•  </a:t>
+            </a:r>
+            <a:r>
+              <a:rPr dirty="0" err="1"/>
+              <a:t>AdamW</a:t>
+            </a:r>
+            <a:endParaRPr dirty="0"/>
           </a:p>
           <a:p>
             <a:pPr>
@@ -6630,8 +6586,14 @@
               </a:defRPr>
             </a:pPr>
             <a:r>
-              <a:t>•  GPU / Colab</a:t>
-            </a:r>
+              <a:rPr dirty="0"/>
+              <a:t>•  GPU / </a:t>
+            </a:r>
+            <a:r>
+              <a:rPr dirty="0" err="1"/>
+              <a:t>Colab</a:t>
+            </a:r>
+            <a:endParaRPr dirty="0"/>
           </a:p>
         </p:txBody>
       </p:sp>
@@ -6675,6 +6637,7 @@
           <a:lstStyle/>
           <a:p>
             <a:pPr algn="ctr"/>
+            <a:endParaRPr/>
           </a:p>
         </p:txBody>
       </p:sp>
@@ -6720,6 +6683,7 @@
           <a:lstStyle/>
           <a:p>
             <a:pPr algn="ctr"/>
+            <a:endParaRPr/>
           </a:p>
         </p:txBody>
       </p:sp>
@@ -6799,7 +6763,7 @@
           <a:p>
             <a:pPr algn="l"/>
             <a:r>
-              <a:rPr sz="1400" b="1">
+              <a:rPr sz="1400" b="1" dirty="0">
                 <a:solidFill>
                   <a:srgbClr val="0F172A"/>
                 </a:solidFill>
@@ -6827,7 +6791,7 @@
           <a:noFill/>
         </p:spPr>
         <p:txBody>
-          <a:bodyPr wrap="square" lIns="73152" rIns="73152" tIns="36576" bIns="36576">
+          <a:bodyPr wrap="square" lIns="73152" tIns="36576" rIns="73152" bIns="36576">
             <a:spAutoFit/>
           </a:bodyPr>
           <a:lstStyle/>
@@ -6844,6 +6808,7 @@
               </a:defRPr>
             </a:pPr>
             <a:r>
+              <a:rPr dirty="0"/>
               <a:t>•  Accuracy</a:t>
             </a:r>
           </a:p>
@@ -6860,6 +6825,7 @@
               </a:defRPr>
             </a:pPr>
             <a:r>
+              <a:rPr dirty="0"/>
               <a:t>•  Confusion matrix</a:t>
             </a:r>
           </a:p>
@@ -6876,6 +6842,7 @@
               </a:defRPr>
             </a:pPr>
             <a:r>
+              <a:rPr dirty="0"/>
               <a:t>•  Predictions</a:t>
             </a:r>
           </a:p>
@@ -6923,6 +6890,7 @@
           <a:lstStyle/>
           <a:p>
             <a:pPr algn="ctr"/>
+            <a:endParaRPr/>
           </a:p>
         </p:txBody>
       </p:sp>
@@ -6950,13 +6918,22 @@
           <a:p>
             <a:pPr algn="ctr"/>
             <a:r>
-              <a:rPr sz="1300" b="1">
+              <a:rPr sz="1300" b="1" dirty="0" err="1">
                 <a:solidFill>
                   <a:srgbClr val="FFFFFF"/>
                 </a:solidFill>
                 <a:latin typeface="Aptos"/>
               </a:rPr>
-              <a:t>OpenLORIS  →  persistent data  →  reproducible batches  →  two ViT paths  →  full test-set evidence</a:t>
+              <a:t>OpenLORIS</a:t>
+            </a:r>
+            <a:r>
+              <a:rPr sz="1300" b="1" dirty="0">
+                <a:solidFill>
+                  <a:srgbClr val="FFFFFF"/>
+                </a:solidFill>
+                <a:latin typeface="Aptos"/>
+              </a:rPr>
+              <a:t>  →  persistent data  →  reproducible batches  →  two ViT paths  →  full test-set evidence</a:t>
             </a:r>
           </a:p>
         </p:txBody>
@@ -6992,6 +6969,64 @@
                 <a:latin typeface="Aptos"/>
               </a:rPr>
               <a:t>PickSense  •  Computer Vision  •  August 2026</a:t>
+            </a:r>
+          </a:p>
+        </p:txBody>
+      </p:sp>
+      <p:sp>
+        <p:nvSpPr>
+          <p:cNvPr id="34" name="Oval 33">
+            <a:extLst>
+              <a:ext uri="{FF2B5EF4-FFF2-40B4-BE49-F238E27FC236}">
+                <a16:creationId xmlns:a16="http://schemas.microsoft.com/office/drawing/2014/main" id="{1C1F809A-4DD5-76C3-1C89-977EB6AB1E2F}"/>
+              </a:ext>
+            </a:extLst>
+          </p:cNvPr>
+          <p:cNvSpPr/>
+          <p:nvPr/>
+        </p:nvSpPr>
+        <p:spPr>
+          <a:xfrm>
+            <a:off x="829056" y="2127504"/>
+            <a:ext cx="438912" cy="438912"/>
+          </a:xfrm>
+          <a:prstGeom prst="ellipse">
+            <a:avLst/>
+          </a:prstGeom>
+          <a:solidFill>
+            <a:srgbClr val="0284C7"/>
+          </a:solidFill>
+          <a:ln>
+            <a:noFill/>
+          </a:ln>
+        </p:spPr>
+        <p:style>
+          <a:lnRef idx="1">
+            <a:schemeClr val="accent1"/>
+          </a:lnRef>
+          <a:fillRef idx="3">
+            <a:schemeClr val="accent1"/>
+          </a:fillRef>
+          <a:effectRef idx="2">
+            <a:schemeClr val="accent1"/>
+          </a:effectRef>
+          <a:fontRef idx="minor">
+            <a:schemeClr val="lt1"/>
+          </a:fontRef>
+        </p:style>
+        <p:txBody>
+          <a:bodyPr rtlCol="0" anchor="ctr"/>
+          <a:lstStyle/>
+          <a:p>
+            <a:pPr algn="ctr"/>
+            <a:r>
+              <a:rPr sz="1200" b="1">
+                <a:solidFill>
+                  <a:srgbClr val="FFFFFF"/>
+                </a:solidFill>
+                <a:latin typeface="Aptos Display"/>
+              </a:rPr>
+              <a:t>01</a:t>
             </a:r>
           </a:p>
         </p:txBody>
@@ -7005,7 +7040,7 @@
 </file>
 
 <file path=ppt/slides/slide4.xml><?xml version="1.0" encoding="utf-8"?>
-<p:sld xmlns:a="http://schemas.openxmlformats.org/drawingml/2006/main" xmlns:p="http://schemas.openxmlformats.org/presentationml/2006/main" xmlns:r="http://schemas.openxmlformats.org/officeDocument/2006/relationships">
+<p:sld xmlns:a="http://schemas.openxmlformats.org/drawingml/2006/main" xmlns:r="http://schemas.openxmlformats.org/officeDocument/2006/relationships" xmlns:p="http://schemas.openxmlformats.org/presentationml/2006/main">
   <p:cSld>
     <p:bg>
       <p:bgPr>
@@ -7021,7 +7056,14 @@
         <p:cNvGrpSpPr/>
         <p:nvPr/>
       </p:nvGrpSpPr>
-      <p:grpSpPr/>
+      <p:grpSpPr>
+        <a:xfrm>
+          <a:off x="0" y="0"/>
+          <a:ext cx="0" cy="0"/>
+          <a:chOff x="0" y="0"/>
+          <a:chExt cx="0" cy="0"/>
+        </a:xfrm>
+      </p:grpSpPr>
       <p:sp>
         <p:nvSpPr>
           <p:cNvPr id="2" name="TextBox 1"/>
@@ -7167,6 +7209,7 @@
           <a:lstStyle/>
           <a:p>
             <a:pPr algn="ctr"/>
+            <a:endParaRPr/>
           </a:p>
         </p:txBody>
       </p:sp>
@@ -7264,6 +7307,7 @@
           <a:lstStyle/>
           <a:p>
             <a:pPr algn="ctr"/>
+            <a:endParaRPr/>
           </a:p>
         </p:txBody>
       </p:sp>
@@ -7342,6 +7386,7 @@
           <a:lstStyle/>
           <a:p>
             <a:pPr algn="ctr"/>
+            <a:endParaRPr/>
           </a:p>
         </p:txBody>
       </p:sp>
@@ -7439,6 +7484,7 @@
           <a:lstStyle/>
           <a:p>
             <a:pPr algn="ctr"/>
+            <a:endParaRPr/>
           </a:p>
         </p:txBody>
       </p:sp>
@@ -7517,6 +7563,7 @@
           <a:lstStyle/>
           <a:p>
             <a:pPr algn="ctr"/>
+            <a:endParaRPr/>
           </a:p>
         </p:txBody>
       </p:sp>
@@ -7614,6 +7661,7 @@
           <a:lstStyle/>
           <a:p>
             <a:pPr algn="ctr"/>
+            <a:endParaRPr/>
           </a:p>
         </p:txBody>
       </p:sp>
@@ -7692,6 +7740,7 @@
           <a:lstStyle/>
           <a:p>
             <a:pPr algn="ctr"/>
+            <a:endParaRPr/>
           </a:p>
         </p:txBody>
       </p:sp>
@@ -7789,6 +7838,7 @@
           <a:lstStyle/>
           <a:p>
             <a:pPr algn="ctr"/>
+            <a:endParaRPr/>
           </a:p>
         </p:txBody>
       </p:sp>
@@ -7867,6 +7917,7 @@
           <a:lstStyle/>
           <a:p>
             <a:pPr algn="ctr"/>
+            <a:endParaRPr/>
           </a:p>
         </p:txBody>
       </p:sp>
@@ -7964,6 +8015,7 @@
           <a:lstStyle/>
           <a:p>
             <a:pPr algn="ctr"/>
+            <a:endParaRPr/>
           </a:p>
         </p:txBody>
       </p:sp>
@@ -8042,6 +8094,7 @@
           <a:lstStyle/>
           <a:p>
             <a:pPr algn="ctr"/>
+            <a:endParaRPr/>
           </a:p>
         </p:txBody>
       </p:sp>
@@ -8139,6 +8192,7 @@
           <a:lstStyle/>
           <a:p>
             <a:pPr algn="ctr"/>
+            <a:endParaRPr/>
           </a:p>
         </p:txBody>
       </p:sp>
@@ -8254,6 +8308,7 @@
           <a:lstStyle/>
           <a:p>
             <a:pPr algn="ctr"/>
+            <a:endParaRPr/>
           </a:p>
         </p:txBody>
       </p:sp>
@@ -8281,7 +8336,7 @@
           <a:p>
             <a:pPr algn="l"/>
             <a:r>
-              <a:rPr sz="3000" b="1">
+              <a:rPr sz="3000" b="1" dirty="0">
                 <a:solidFill>
                   <a:srgbClr val="64748B"/>
                 </a:solidFill>
@@ -8300,7 +8355,7 @@
         </p:nvSpPr>
         <p:spPr>
           <a:xfrm>
-            <a:off x="5175504" y="2926080"/>
+            <a:off x="5175504" y="2962231"/>
             <a:ext cx="2103120" cy="256032"/>
           </a:xfrm>
           <a:prstGeom prst="rect">
@@ -8316,7 +8371,7 @@
           <a:p>
             <a:pPr algn="l"/>
             <a:r>
-              <a:rPr sz="1100" b="0">
+              <a:rPr sz="1100" b="0" dirty="0">
                 <a:solidFill>
                   <a:srgbClr val="64748B"/>
                 </a:solidFill>
@@ -8367,6 +8422,7 @@
           <a:lstStyle/>
           <a:p>
             <a:pPr algn="ctr"/>
+            <a:endParaRPr/>
           </a:p>
         </p:txBody>
       </p:sp>
@@ -8412,6 +8468,7 @@
           <a:lstStyle/>
           <a:p>
             <a:pPr algn="ctr"/>
+            <a:endParaRPr/>
           </a:p>
         </p:txBody>
       </p:sp>
@@ -8439,7 +8496,7 @@
           <a:p>
             <a:pPr algn="l"/>
             <a:r>
-              <a:rPr sz="3000" b="1">
+              <a:rPr sz="3000" b="1" dirty="0">
                 <a:solidFill>
                   <a:srgbClr val="0F766E"/>
                 </a:solidFill>
@@ -8474,7 +8531,7 @@
           <a:p>
             <a:pPr algn="l"/>
             <a:r>
-              <a:rPr sz="1100" b="0">
+              <a:rPr sz="1100" b="0" dirty="0">
                 <a:solidFill>
                   <a:srgbClr val="0F766E"/>
                 </a:solidFill>
@@ -8527,6 +8584,7 @@
           <a:lstStyle/>
           <a:p>
             <a:pPr algn="ctr"/>
+            <a:endParaRPr/>
           </a:p>
         </p:txBody>
       </p:sp>
@@ -8554,7 +8612,7 @@
           <a:p>
             <a:pPr algn="l"/>
             <a:r>
-              <a:rPr sz="2200" b="1">
+              <a:rPr sz="2200" b="1" dirty="0">
                 <a:solidFill>
                   <a:srgbClr val="0F172A"/>
                 </a:solidFill>
@@ -8589,7 +8647,7 @@
           <a:p>
             <a:pPr algn="l"/>
             <a:r>
-              <a:rPr sz="1000" b="0">
+              <a:rPr sz="1000" b="0" dirty="0">
                 <a:solidFill>
                   <a:srgbClr val="64748B"/>
                 </a:solidFill>
@@ -8642,6 +8700,7 @@
           <a:lstStyle/>
           <a:p>
             <a:pPr algn="ctr"/>
+            <a:endParaRPr/>
           </a:p>
         </p:txBody>
       </p:sp>
@@ -8669,7 +8728,7 @@
           <a:p>
             <a:pPr algn="l"/>
             <a:r>
-              <a:rPr sz="2200" b="1">
+              <a:rPr sz="2200" b="1" dirty="0">
                 <a:solidFill>
                   <a:srgbClr val="0F172A"/>
                 </a:solidFill>
@@ -8704,7 +8763,7 @@
           <a:p>
             <a:pPr algn="l"/>
             <a:r>
-              <a:rPr sz="1000" b="0">
+              <a:rPr sz="1000" b="0" dirty="0">
                 <a:solidFill>
                   <a:srgbClr val="64748B"/>
                 </a:solidFill>
@@ -8757,6 +8816,7 @@
           <a:lstStyle/>
           <a:p>
             <a:pPr algn="ctr"/>
+            <a:endParaRPr/>
           </a:p>
         </p:txBody>
       </p:sp>
@@ -8784,7 +8844,7 @@
           <a:p>
             <a:pPr algn="l"/>
             <a:r>
-              <a:rPr sz="2200" b="1">
+              <a:rPr sz="2200" b="1" dirty="0">
                 <a:solidFill>
                   <a:srgbClr val="0F172A"/>
                 </a:solidFill>
@@ -8819,7 +8879,7 @@
           <a:p>
             <a:pPr algn="l"/>
             <a:r>
-              <a:rPr sz="1000" b="0">
+              <a:rPr sz="1000" b="0" dirty="0">
                 <a:solidFill>
                   <a:srgbClr val="64748B"/>
                 </a:solidFill>
@@ -8872,6 +8932,7 @@
           <a:lstStyle/>
           <a:p>
             <a:pPr algn="ctr"/>
+            <a:endParaRPr/>
           </a:p>
         </p:txBody>
       </p:sp>
@@ -8899,7 +8960,7 @@
           <a:p>
             <a:pPr algn="ctr"/>
             <a:r>
-              <a:rPr sz="1100" b="1">
+              <a:rPr sz="1100" b="1" dirty="0">
                 <a:solidFill>
                   <a:srgbClr val="0284C7"/>
                 </a:solidFill>
@@ -8954,7 +9015,7 @@
 </file>
 
 <file path=ppt/slides/slide5.xml><?xml version="1.0" encoding="utf-8"?>
-<p:sld xmlns:a="http://schemas.openxmlformats.org/drawingml/2006/main" xmlns:p="http://schemas.openxmlformats.org/presentationml/2006/main" xmlns:r="http://schemas.openxmlformats.org/officeDocument/2006/relationships">
+<p:sld xmlns:a="http://schemas.openxmlformats.org/drawingml/2006/main" xmlns:r="http://schemas.openxmlformats.org/officeDocument/2006/relationships" xmlns:p="http://schemas.openxmlformats.org/presentationml/2006/main">
   <p:cSld>
     <p:bg>
       <p:bgPr>
@@ -8970,7 +9031,14 @@
         <p:cNvGrpSpPr/>
         <p:nvPr/>
       </p:nvGrpSpPr>
-      <p:grpSpPr/>
+      <p:grpSpPr>
+        <a:xfrm>
+          <a:off x="0" y="0"/>
+          <a:ext cx="0" cy="0"/>
+          <a:chOff x="0" y="0"/>
+          <a:chExt cx="0" cy="0"/>
+        </a:xfrm>
+      </p:grpSpPr>
       <p:sp>
         <p:nvSpPr>
           <p:cNvPr id="2" name="TextBox 1"/>
@@ -9116,6 +9184,7 @@
           <a:lstStyle/>
           <a:p>
             <a:pPr algn="ctr"/>
+            <a:endParaRPr/>
           </a:p>
         </p:txBody>
       </p:sp>
@@ -9161,6 +9230,7 @@
           <a:lstStyle/>
           <a:p>
             <a:pPr algn="ctr"/>
+            <a:endParaRPr/>
           </a:p>
         </p:txBody>
       </p:sp>
@@ -9188,7 +9258,7 @@
           <a:p>
             <a:pPr algn="l"/>
             <a:r>
-              <a:rPr sz="1500" b="1">
+              <a:rPr sz="1500" b="1" dirty="0">
                 <a:solidFill>
                   <a:srgbClr val="0284C7"/>
                 </a:solidFill>
@@ -9223,7 +9293,7 @@
           <a:p>
             <a:pPr algn="l"/>
             <a:r>
-              <a:rPr sz="1100" b="0">
+              <a:rPr sz="1100" b="0" dirty="0">
                 <a:solidFill>
                   <a:srgbClr val="64748B"/>
                 </a:solidFill>
@@ -9275,7 +9345,7 @@
           <a:p>
             <a:pPr algn="ctr"/>
             <a:r>
-              <a:rPr sz="900" b="1">
+              <a:rPr sz="900" b="1" dirty="0">
                 <a:solidFill>
                   <a:srgbClr val="FFFFFF"/>
                 </a:solidFill>
@@ -9310,7 +9380,7 @@
           <a:p>
             <a:pPr algn="l"/>
             <a:r>
-              <a:rPr sz="1200" b="1">
+              <a:rPr sz="1200" b="1" dirty="0">
                 <a:solidFill>
                   <a:srgbClr val="0F172A"/>
                 </a:solidFill>
@@ -9397,7 +9467,7 @@
           <a:p>
             <a:pPr algn="l"/>
             <a:r>
-              <a:rPr sz="1200" b="1">
+              <a:rPr sz="1200" b="1" dirty="0">
                 <a:solidFill>
                   <a:srgbClr val="0F172A"/>
                 </a:solidFill>
@@ -9484,7 +9554,7 @@
           <a:p>
             <a:pPr algn="l"/>
             <a:r>
-              <a:rPr sz="1200" b="1">
+              <a:rPr sz="1200" b="1" dirty="0">
                 <a:solidFill>
                   <a:srgbClr val="0F172A"/>
                 </a:solidFill>
@@ -9536,7 +9606,7 @@
           <a:p>
             <a:pPr algn="ctr"/>
             <a:r>
-              <a:rPr sz="900" b="1">
+              <a:rPr sz="900" b="1" dirty="0">
                 <a:solidFill>
                   <a:srgbClr val="FFFFFF"/>
                 </a:solidFill>
@@ -9571,7 +9641,7 @@
           <a:p>
             <a:pPr algn="l"/>
             <a:r>
-              <a:rPr sz="1200" b="1">
+              <a:rPr sz="1200" b="1" dirty="0">
                 <a:solidFill>
                   <a:srgbClr val="0F172A"/>
                 </a:solidFill>
@@ -9642,7 +9712,7 @@
         </p:nvSpPr>
         <p:spPr>
           <a:xfrm>
-            <a:off x="1389888" y="4946904"/>
+            <a:off x="1312164" y="4946904"/>
             <a:ext cx="3611880" cy="329184"/>
           </a:xfrm>
           <a:prstGeom prst="rect">
@@ -9658,7 +9728,7 @@
           <a:p>
             <a:pPr algn="l"/>
             <a:r>
-              <a:rPr sz="1200" b="1">
+              <a:rPr sz="1200" b="1" dirty="0">
                 <a:solidFill>
                   <a:srgbClr val="0F172A"/>
                 </a:solidFill>
@@ -9711,6 +9781,7 @@
           <a:lstStyle/>
           <a:p>
             <a:pPr algn="ctr"/>
+            <a:endParaRPr/>
           </a:p>
         </p:txBody>
       </p:sp>
@@ -9757,7 +9828,7 @@
         </p:nvSpPr>
         <p:spPr>
           <a:xfrm>
-            <a:off x="6236208" y="1719072"/>
+            <a:off x="6084343" y="1643634"/>
             <a:ext cx="5358384" cy="4407408"/>
           </a:xfrm>
           <a:prstGeom prst="roundRect">
@@ -9791,6 +9862,7 @@
           <a:lstStyle/>
           <a:p>
             <a:pPr algn="ctr"/>
+            <a:endParaRPr/>
           </a:p>
         </p:txBody>
       </p:sp>
@@ -9818,7 +9890,7 @@
           <a:p>
             <a:pPr algn="l"/>
             <a:r>
-              <a:rPr sz="1500" b="1">
+              <a:rPr sz="1500" b="1" dirty="0">
                 <a:solidFill>
                   <a:srgbClr val="5EEAD4"/>
                 </a:solidFill>
@@ -9853,7 +9925,7 @@
           <a:p>
             <a:pPr algn="l"/>
             <a:r>
-              <a:rPr sz="1100" b="0">
+              <a:rPr sz="1100" b="0" dirty="0">
                 <a:solidFill>
                   <a:srgbClr val="CBD5E1"/>
                 </a:solidFill>
@@ -9905,7 +9977,7 @@
           <a:p>
             <a:pPr algn="ctr"/>
             <a:r>
-              <a:rPr sz="900" b="1">
+              <a:rPr sz="900" b="1" dirty="0">
                 <a:solidFill>
                   <a:srgbClr val="FFFFFF"/>
                 </a:solidFill>
@@ -9940,7 +10012,7 @@
           <a:p>
             <a:pPr algn="l"/>
             <a:r>
-              <a:rPr sz="1200" b="1">
+              <a:rPr sz="1200" b="1" dirty="0">
                 <a:solidFill>
                   <a:srgbClr val="FFFFFF"/>
                 </a:solidFill>
@@ -9992,7 +10064,7 @@
           <a:p>
             <a:pPr algn="ctr"/>
             <a:r>
-              <a:rPr sz="900" b="1">
+              <a:rPr sz="900" b="1" dirty="0">
                 <a:solidFill>
                   <a:srgbClr val="FFFFFF"/>
                 </a:solidFill>
@@ -10027,7 +10099,7 @@
           <a:p>
             <a:pPr algn="l"/>
             <a:r>
-              <a:rPr sz="1200" b="1">
+              <a:rPr sz="1200" b="1" dirty="0">
                 <a:solidFill>
                   <a:srgbClr val="FFFFFF"/>
                 </a:solidFill>
@@ -10079,7 +10151,7 @@
           <a:p>
             <a:pPr algn="ctr"/>
             <a:r>
-              <a:rPr sz="900" b="1">
+              <a:rPr sz="900" b="1" dirty="0">
                 <a:solidFill>
                   <a:srgbClr val="FFFFFF"/>
                 </a:solidFill>
@@ -10114,7 +10186,7 @@
           <a:p>
             <a:pPr algn="l"/>
             <a:r>
-              <a:rPr sz="1200" b="1">
+              <a:rPr sz="1200" b="1" dirty="0">
                 <a:solidFill>
                   <a:srgbClr val="FFFFFF"/>
                 </a:solidFill>
@@ -10166,7 +10238,7 @@
           <a:p>
             <a:pPr algn="ctr"/>
             <a:r>
-              <a:rPr sz="900" b="1">
+              <a:rPr sz="900" b="1" dirty="0">
                 <a:solidFill>
                   <a:srgbClr val="FFFFFF"/>
                 </a:solidFill>
@@ -10201,7 +10273,7 @@
           <a:p>
             <a:pPr algn="l"/>
             <a:r>
-              <a:rPr sz="1200" b="1">
+              <a:rPr sz="1200" b="1" dirty="0">
                 <a:solidFill>
                   <a:srgbClr val="FFFFFF"/>
                 </a:solidFill>
@@ -10288,13 +10360,31 @@
           <a:p>
             <a:pPr algn="l"/>
             <a:r>
-              <a:rPr sz="1200" b="1">
+              <a:rPr sz="1200" b="1" dirty="0">
                 <a:solidFill>
                   <a:srgbClr val="FFFFFF"/>
                 </a:solidFill>
                 <a:latin typeface="Aptos"/>
               </a:rPr>
-              <a:t>3 PickSense classes</a:t>
+              <a:t>3 </a:t>
+            </a:r>
+            <a:r>
+              <a:rPr sz="1200" b="1" dirty="0" err="1">
+                <a:solidFill>
+                  <a:srgbClr val="FFFFFF"/>
+                </a:solidFill>
+                <a:latin typeface="Aptos"/>
+              </a:rPr>
+              <a:t>PickSense</a:t>
+            </a:r>
+            <a:r>
+              <a:rPr sz="1200" b="1" dirty="0">
+                <a:solidFill>
+                  <a:srgbClr val="FFFFFF"/>
+                </a:solidFill>
+                <a:latin typeface="Aptos"/>
+              </a:rPr>
+              <a:t> classes</a:t>
             </a:r>
           </a:p>
         </p:txBody>
@@ -10341,6 +10431,7 @@
           <a:lstStyle/>
           <a:p>
             <a:pPr algn="ctr"/>
+            <a:endParaRPr/>
           </a:p>
         </p:txBody>
       </p:sp>
@@ -10423,7 +10514,7 @@
 </file>
 
 <file path=ppt/slides/slide6.xml><?xml version="1.0" encoding="utf-8"?>
-<p:sld xmlns:a="http://schemas.openxmlformats.org/drawingml/2006/main" xmlns:p="http://schemas.openxmlformats.org/presentationml/2006/main" xmlns:r="http://schemas.openxmlformats.org/officeDocument/2006/relationships">
+<p:sld xmlns:a="http://schemas.openxmlformats.org/drawingml/2006/main" xmlns:r="http://schemas.openxmlformats.org/officeDocument/2006/relationships" xmlns:p="http://schemas.openxmlformats.org/presentationml/2006/main">
   <p:cSld>
     <p:bg>
       <p:bgPr>
@@ -10439,7 +10530,14 @@
         <p:cNvGrpSpPr/>
         <p:nvPr/>
       </p:nvGrpSpPr>
-      <p:grpSpPr/>
+      <p:grpSpPr>
+        <a:xfrm>
+          <a:off x="0" y="0"/>
+          <a:ext cx="0" cy="0"/>
+          <a:chOff x="0" y="0"/>
+          <a:chExt cx="0" cy="0"/>
+        </a:xfrm>
+      </p:grpSpPr>
       <p:sp>
         <p:nvSpPr>
           <p:cNvPr id="2" name="TextBox 1"/>
@@ -10585,6 +10683,7 @@
           <a:lstStyle/>
           <a:p>
             <a:pPr algn="ctr"/>
+            <a:endParaRPr/>
           </a:p>
         </p:txBody>
       </p:sp>
@@ -10630,6 +10729,7 @@
           <a:lstStyle/>
           <a:p>
             <a:pPr algn="ctr"/>
+            <a:endParaRPr/>
           </a:p>
         </p:txBody>
       </p:sp>
@@ -10657,7 +10757,7 @@
           <a:p>
             <a:pPr algn="ctr"/>
             <a:r>
-              <a:rPr sz="4300" b="1">
+              <a:rPr sz="4300" b="1" dirty="0">
                 <a:solidFill>
                   <a:srgbClr val="5EEAD4"/>
                 </a:solidFill>
@@ -10692,7 +10792,7 @@
           <a:p>
             <a:pPr algn="ctr"/>
             <a:r>
-              <a:rPr sz="1300" b="1">
+              <a:rPr sz="1300" b="1" dirty="0">
                 <a:solidFill>
                   <a:srgbClr val="FFFFFF"/>
                 </a:solidFill>
@@ -10727,7 +10827,7 @@
           <a:p>
             <a:pPr algn="ctr"/>
             <a:r>
-              <a:rPr sz="2200" b="1">
+              <a:rPr sz="2200" b="1" dirty="0">
                 <a:solidFill>
                   <a:srgbClr val="FFFFFF"/>
                 </a:solidFill>
@@ -10762,7 +10862,7 @@
           <a:p>
             <a:pPr algn="ctr"/>
             <a:r>
-              <a:rPr sz="1000" b="0">
+              <a:rPr sz="1000" b="0" dirty="0">
                 <a:solidFill>
                   <a:srgbClr val="94A3B8"/>
                 </a:solidFill>
@@ -10815,6 +10915,7 @@
           <a:lstStyle/>
           <a:p>
             <a:pPr algn="ctr"/>
+            <a:endParaRPr/>
           </a:p>
         </p:txBody>
       </p:sp>
@@ -10842,7 +10943,7 @@
           <a:p>
             <a:pPr algn="l"/>
             <a:r>
-              <a:rPr sz="1200" b="1">
+              <a:rPr sz="1200" b="1" dirty="0">
                 <a:solidFill>
                   <a:srgbClr val="CBD5E1"/>
                 </a:solidFill>
@@ -10877,7 +10978,7 @@
           <a:p>
             <a:pPr algn="l"/>
             <a:r>
-              <a:rPr sz="1200" b="1">
+              <a:rPr sz="1200" b="1" dirty="0">
                 <a:solidFill>
                   <a:srgbClr val="5EEAD4"/>
                 </a:solidFill>
@@ -10912,7 +11013,7 @@
           <a:p>
             <a:pPr algn="l"/>
             <a:r>
-              <a:rPr sz="1100" b="0">
+              <a:rPr sz="1100" b="0" dirty="0">
                 <a:solidFill>
                   <a:srgbClr val="94A3B8"/>
                 </a:solidFill>
@@ -10947,7 +11048,7 @@
           <a:p>
             <a:pPr algn="l"/>
             <a:r>
-              <a:rPr sz="1100" b="1">
+              <a:rPr sz="1100" b="1" dirty="0">
                 <a:solidFill>
                   <a:srgbClr val="64748B"/>
                 </a:solidFill>
@@ -10982,7 +11083,7 @@
           <a:p>
             <a:pPr algn="l"/>
             <a:r>
-              <a:rPr sz="1200" b="1">
+              <a:rPr sz="1200" b="1" dirty="0">
                 <a:solidFill>
                   <a:srgbClr val="334155"/>
                 </a:solidFill>
@@ -11035,6 +11136,7 @@
           <a:lstStyle/>
           <a:p>
             <a:pPr algn="ctr"/>
+            <a:endParaRPr/>
           </a:p>
         </p:txBody>
       </p:sp>
@@ -11080,6 +11182,7 @@
           <a:lstStyle/>
           <a:p>
             <a:pPr algn="ctr"/>
+            <a:endParaRPr/>
           </a:p>
         </p:txBody>
       </p:sp>
@@ -11107,7 +11210,7 @@
           <a:p>
             <a:pPr algn="l"/>
             <a:r>
-              <a:rPr sz="1200" b="1">
+              <a:rPr sz="1200" b="1" dirty="0">
                 <a:solidFill>
                   <a:srgbClr val="F97316"/>
                 </a:solidFill>
@@ -11142,7 +11245,7 @@
           <a:p>
             <a:pPr algn="l"/>
             <a:r>
-              <a:rPr sz="900" b="0">
+              <a:rPr sz="900" b="0" dirty="0">
                 <a:solidFill>
                   <a:srgbClr val="64748B"/>
                 </a:solidFill>
@@ -11177,7 +11280,7 @@
           <a:p>
             <a:pPr algn="l"/>
             <a:r>
-              <a:rPr sz="1200" b="1">
+              <a:rPr sz="1200" b="1" dirty="0">
                 <a:solidFill>
                   <a:srgbClr val="334155"/>
                 </a:solidFill>
@@ -11230,6 +11333,7 @@
           <a:lstStyle/>
           <a:p>
             <a:pPr algn="ctr"/>
+            <a:endParaRPr/>
           </a:p>
         </p:txBody>
       </p:sp>
@@ -11275,6 +11379,7 @@
           <a:lstStyle/>
           <a:p>
             <a:pPr algn="ctr"/>
+            <a:endParaRPr/>
           </a:p>
         </p:txBody>
       </p:sp>
@@ -11302,7 +11407,7 @@
           <a:p>
             <a:pPr algn="l"/>
             <a:r>
-              <a:rPr sz="1200" b="1">
+              <a:rPr sz="1200" b="1" dirty="0">
                 <a:solidFill>
                   <a:srgbClr val="0F766E"/>
                 </a:solidFill>
@@ -11337,7 +11442,7 @@
           <a:p>
             <a:pPr algn="l"/>
             <a:r>
-              <a:rPr sz="900" b="0">
+              <a:rPr sz="900" b="0" dirty="0">
                 <a:solidFill>
                   <a:srgbClr val="64748B"/>
                 </a:solidFill>
@@ -11390,6 +11495,7 @@
           <a:lstStyle/>
           <a:p>
             <a:pPr algn="ctr"/>
+            <a:endParaRPr/>
           </a:p>
         </p:txBody>
       </p:sp>
@@ -11417,7 +11523,7 @@
           <a:p>
             <a:pPr algn="ctr"/>
             <a:r>
-              <a:rPr sz="1300" b="1">
+              <a:rPr sz="1300" b="1" dirty="0">
                 <a:solidFill>
                   <a:srgbClr val="0F766E"/>
                 </a:solidFill>
@@ -11452,7 +11558,7 @@
           <a:p>
             <a:pPr algn="l"/>
             <a:r>
-              <a:rPr sz="1100" b="1">
+              <a:rPr sz="1100" b="1" dirty="0">
                 <a:solidFill>
                   <a:srgbClr val="64748B"/>
                 </a:solidFill>
@@ -11487,7 +11593,7 @@
           <a:p>
             <a:pPr algn="l"/>
             <a:r>
-              <a:rPr sz="1200" b="1">
+              <a:rPr sz="1200" b="1" dirty="0">
                 <a:solidFill>
                   <a:srgbClr val="334155"/>
                 </a:solidFill>
@@ -11540,6 +11646,7 @@
           <a:lstStyle/>
           <a:p>
             <a:pPr algn="ctr"/>
+            <a:endParaRPr/>
           </a:p>
         </p:txBody>
       </p:sp>
@@ -11585,6 +11692,7 @@
           <a:lstStyle/>
           <a:p>
             <a:pPr algn="ctr"/>
+            <a:endParaRPr/>
           </a:p>
         </p:txBody>
       </p:sp>
@@ -11612,7 +11720,7 @@
           <a:p>
             <a:pPr algn="l"/>
             <a:r>
-              <a:rPr sz="1200" b="1">
+              <a:rPr sz="1200" b="1" dirty="0">
                 <a:solidFill>
                   <a:srgbClr val="0284C7"/>
                 </a:solidFill>
@@ -11647,7 +11755,7 @@
           <a:p>
             <a:pPr algn="l"/>
             <a:r>
-              <a:rPr sz="1200" b="1">
+              <a:rPr sz="1200" b="1" dirty="0">
                 <a:solidFill>
                   <a:srgbClr val="334155"/>
                 </a:solidFill>
@@ -11700,6 +11808,7 @@
           <a:lstStyle/>
           <a:p>
             <a:pPr algn="ctr"/>
+            <a:endParaRPr/>
           </a:p>
         </p:txBody>
       </p:sp>
@@ -11745,6 +11854,7 @@
           <a:lstStyle/>
           <a:p>
             <a:pPr algn="ctr"/>
+            <a:endParaRPr/>
           </a:p>
         </p:txBody>
       </p:sp>
@@ -11772,7 +11882,7 @@
           <a:p>
             <a:pPr algn="l"/>
             <a:r>
-              <a:rPr sz="1200" b="1">
+              <a:rPr sz="1200" b="1" dirty="0">
                 <a:solidFill>
                   <a:srgbClr val="F97316"/>
                 </a:solidFill>
@@ -11807,7 +11917,7 @@
           <a:p>
             <a:pPr algn="l"/>
             <a:r>
-              <a:rPr sz="1200" b="1">
+              <a:rPr sz="1200" b="1" dirty="0">
                 <a:solidFill>
                   <a:srgbClr val="334155"/>
                 </a:solidFill>
@@ -11860,6 +11970,7 @@
           <a:lstStyle/>
           <a:p>
             <a:pPr algn="ctr"/>
+            <a:endParaRPr/>
           </a:p>
         </p:txBody>
       </p:sp>
@@ -11905,6 +12016,7 @@
           <a:lstStyle/>
           <a:p>
             <a:pPr algn="ctr"/>
+            <a:endParaRPr/>
           </a:p>
         </p:txBody>
       </p:sp>
@@ -11932,7 +12044,7 @@
           <a:p>
             <a:pPr algn="l"/>
             <a:r>
-              <a:rPr sz="1200" b="1">
+              <a:rPr sz="1200" b="1" dirty="0">
                 <a:solidFill>
                   <a:srgbClr val="0F172A"/>
                 </a:solidFill>
@@ -11987,7 +12099,7 @@
 </file>
 
 <file path=ppt/slides/slide7.xml><?xml version="1.0" encoding="utf-8"?>
-<p:sld xmlns:a="http://schemas.openxmlformats.org/drawingml/2006/main" xmlns:p="http://schemas.openxmlformats.org/presentationml/2006/main" xmlns:r="http://schemas.openxmlformats.org/officeDocument/2006/relationships">
+<p:sld xmlns:a="http://schemas.openxmlformats.org/drawingml/2006/main" xmlns:r="http://schemas.openxmlformats.org/officeDocument/2006/relationships" xmlns:p="http://schemas.openxmlformats.org/presentationml/2006/main">
   <p:cSld>
     <p:bg>
       <p:bgPr>
@@ -12003,7 +12115,14 @@
         <p:cNvGrpSpPr/>
         <p:nvPr/>
       </p:nvGrpSpPr>
-      <p:grpSpPr/>
+      <p:grpSpPr>
+        <a:xfrm>
+          <a:off x="0" y="0"/>
+          <a:ext cx="0" cy="0"/>
+          <a:chOff x="0" y="0"/>
+          <a:chExt cx="0" cy="0"/>
+        </a:xfrm>
+      </p:grpSpPr>
       <p:sp>
         <p:nvSpPr>
           <p:cNvPr id="2" name="TextBox 1"/>
@@ -12098,7 +12217,7 @@
           <a:p>
             <a:pPr algn="l"/>
             <a:r>
-              <a:rPr sz="2800" b="1">
+              <a:rPr sz="2800" b="1" dirty="0">
                 <a:solidFill>
                   <a:srgbClr val="0F172A"/>
                 </a:solidFill>
@@ -12149,6 +12268,7 @@
           <a:lstStyle/>
           <a:p>
             <a:pPr algn="ctr"/>
+            <a:endParaRPr/>
           </a:p>
         </p:txBody>
       </p:sp>
@@ -12176,7 +12296,7 @@
           <a:p>
             <a:pPr algn="l"/>
             <a:r>
-              <a:rPr sz="1100" b="1">
+              <a:rPr sz="1100" b="1" dirty="0">
                 <a:solidFill>
                   <a:srgbClr val="64748B"/>
                 </a:solidFill>
@@ -12349,6 +12469,7 @@
           <a:lstStyle/>
           <a:p>
             <a:pPr algn="ctr"/>
+            <a:endParaRPr/>
           </a:p>
         </p:txBody>
       </p:sp>
@@ -12514,6 +12635,7 @@
           <a:lstStyle/>
           <a:p>
             <a:pPr algn="ctr"/>
+            <a:endParaRPr/>
           </a:p>
         </p:txBody>
       </p:sp>
@@ -12679,6 +12801,7 @@
           <a:lstStyle/>
           <a:p>
             <a:pPr algn="ctr"/>
+            <a:endParaRPr/>
           </a:p>
         </p:txBody>
       </p:sp>
@@ -12844,6 +12967,7 @@
           <a:lstStyle/>
           <a:p>
             <a:pPr algn="ctr"/>
+            <a:endParaRPr/>
           </a:p>
         </p:txBody>
       </p:sp>
@@ -12888,7 +13012,7 @@
           <a:p>
             <a:pPr algn="ctr"/>
             <a:r>
-              <a:rPr sz="1500" b="1">
+              <a:rPr sz="1500" b="1" dirty="0">
                 <a:solidFill>
                   <a:srgbClr val="FFFFFF"/>
                 </a:solidFill>
@@ -13011,6 +13135,7 @@
           <a:lstStyle/>
           <a:p>
             <a:pPr algn="ctr"/>
+            <a:endParaRPr/>
           </a:p>
         </p:txBody>
       </p:sp>
@@ -13066,7 +13191,7 @@
           <a:noFill/>
         </p:spPr>
         <p:txBody>
-          <a:bodyPr wrap="square" lIns="73152" rIns="73152" tIns="36576" bIns="36576">
+          <a:bodyPr wrap="square" lIns="73152" tIns="36576" rIns="73152" bIns="36576">
             <a:spAutoFit/>
           </a:bodyPr>
           <a:lstStyle/>
@@ -13083,6 +13208,7 @@
               </a:defRPr>
             </a:pPr>
             <a:r>
+              <a:rPr dirty="0"/>
               <a:t>•  A tiny training set can be memorized without generalizing.</a:t>
             </a:r>
           </a:p>
@@ -13099,6 +13225,7 @@
               </a:defRPr>
             </a:pPr>
             <a:r>
+              <a:rPr dirty="0"/>
               <a:t>•  Data design and infrastructure changed accuracy more than another model tweak.</a:t>
             </a:r>
           </a:p>
@@ -13115,6 +13242,7 @@
               </a:defRPr>
             </a:pPr>
             <a:r>
+              <a:rPr dirty="0"/>
               <a:t>•  The full test set and class-level metrics made the improvement defensible.</a:t>
             </a:r>
           </a:p>
@@ -13162,6 +13290,7 @@
           <a:lstStyle/>
           <a:p>
             <a:pPr algn="ctr"/>
+            <a:endParaRPr/>
           </a:p>
         </p:txBody>
       </p:sp>
@@ -13217,7 +13346,7 @@
           <a:noFill/>
         </p:spPr>
         <p:txBody>
-          <a:bodyPr wrap="square" lIns="73152" rIns="73152" tIns="36576" bIns="36576">
+          <a:bodyPr wrap="square" lIns="73152" tIns="36576" rIns="73152" bIns="36576">
             <a:spAutoFit/>
           </a:bodyPr>
           <a:lstStyle/>
@@ -13345,6 +13474,7 @@
           <a:lstStyle/>
           <a:p>
             <a:pPr algn="ctr"/>
+            <a:endParaRPr/>
           </a:p>
         </p:txBody>
       </p:sp>
@@ -13372,7 +13502,7 @@
           <a:p>
             <a:pPr algn="ctr"/>
             <a:r>
-              <a:rPr sz="1300" b="1">
+              <a:rPr sz="1300" b="1" dirty="0">
                 <a:solidFill>
                   <a:srgbClr val="0F766E"/>
                 </a:solidFill>
@@ -13757,44 +13887,44 @@
         <a:sysClr val="window" lastClr="FFFFFF"/>
       </a:lt1>
       <a:dk2>
-        <a:srgbClr val="1F497D"/>
+        <a:srgbClr val="0E2841"/>
       </a:dk2>
       <a:lt2>
-        <a:srgbClr val="EEECE1"/>
+        <a:srgbClr val="E8E8E8"/>
       </a:lt2>
       <a:accent1>
-        <a:srgbClr val="4F81BD"/>
+        <a:srgbClr val="156082"/>
       </a:accent1>
       <a:accent2>
-        <a:srgbClr val="C0504D"/>
+        <a:srgbClr val="E97132"/>
       </a:accent2>
       <a:accent3>
-        <a:srgbClr val="9BBB59"/>
+        <a:srgbClr val="196B24"/>
       </a:accent3>
       <a:accent4>
-        <a:srgbClr val="8064A2"/>
+        <a:srgbClr val="0F9ED5"/>
       </a:accent4>
       <a:accent5>
-        <a:srgbClr val="4BACC6"/>
+        <a:srgbClr val="A02B93"/>
       </a:accent5>
       <a:accent6>
-        <a:srgbClr val="F79646"/>
+        <a:srgbClr val="4EA72E"/>
       </a:accent6>
       <a:hlink>
-        <a:srgbClr val="0000FF"/>
+        <a:srgbClr val="467886"/>
       </a:hlink>
       <a:folHlink>
-        <a:srgbClr val="800080"/>
+        <a:srgbClr val="96607D"/>
       </a:folHlink>
     </a:clrScheme>
     <a:fontScheme name="Office">
       <a:majorFont>
-        <a:latin typeface="Calibri"/>
+        <a:latin typeface="Aptos Display" panose="02110004020202020204"/>
         <a:ea typeface=""/>
         <a:cs typeface=""/>
-        <a:font script="Jpan" typeface="ＭＳ Ｐゴシック"/>
+        <a:font script="Jpan" typeface="游ゴシック Light"/>
         <a:font script="Hang" typeface="맑은 고딕"/>
-        <a:font script="Hans" typeface="宋体"/>
+        <a:font script="Hans" typeface="等线 Light"/>
         <a:font script="Hant" typeface="新細明體"/>
         <a:font script="Arab" typeface="Times New Roman"/>
         <a:font script="Hebr" typeface="Times New Roman"/>
@@ -13822,14 +13952,31 @@
         <a:font script="Viet" typeface="Times New Roman"/>
         <a:font script="Uigh" typeface="Microsoft Uighur"/>
         <a:font script="Geor" typeface="Sylfaen"/>
+        <a:font script="Armn" typeface="Arial"/>
+        <a:font script="Bugi" typeface="Leelawadee UI"/>
+        <a:font script="Bopo" typeface="Microsoft JhengHei"/>
+        <a:font script="Java" typeface="Javanese Text"/>
+        <a:font script="Lisu" typeface="Segoe UI"/>
+        <a:font script="Mymr" typeface="Myanmar Text"/>
+        <a:font script="Nkoo" typeface="Ebrima"/>
+        <a:font script="Olck" typeface="Nirmala UI"/>
+        <a:font script="Osma" typeface="Ebrima"/>
+        <a:font script="Phag" typeface="Phagspa"/>
+        <a:font script="Syrn" typeface="Estrangelo Edessa"/>
+        <a:font script="Syrj" typeface="Estrangelo Edessa"/>
+        <a:font script="Syre" typeface="Estrangelo Edessa"/>
+        <a:font script="Sora" typeface="Nirmala UI"/>
+        <a:font script="Tale" typeface="Microsoft Tai Le"/>
+        <a:font script="Talu" typeface="Microsoft New Tai Lue"/>
+        <a:font script="Tfng" typeface="Ebrima"/>
       </a:majorFont>
       <a:minorFont>
-        <a:latin typeface="Calibri"/>
+        <a:latin typeface="Aptos" panose="02110004020202020204"/>
         <a:ea typeface=""/>
         <a:cs typeface=""/>
-        <a:font script="Jpan" typeface="ＭＳ Ｐゴシック"/>
+        <a:font script="Jpan" typeface="游ゴシック"/>
         <a:font script="Hang" typeface="맑은 고딕"/>
-        <a:font script="Hans" typeface="宋体"/>
+        <a:font script="Hans" typeface="等线"/>
         <a:font script="Hant" typeface="新細明體"/>
         <a:font script="Arab" typeface="Arial"/>
         <a:font script="Hebr" typeface="Arial"/>
@@ -13857,6 +14004,23 @@
         <a:font script="Viet" typeface="Arial"/>
         <a:font script="Uigh" typeface="Microsoft Uighur"/>
         <a:font script="Geor" typeface="Sylfaen"/>
+        <a:font script="Armn" typeface="Arial"/>
+        <a:font script="Bugi" typeface="Leelawadee UI"/>
+        <a:font script="Bopo" typeface="Microsoft JhengHei"/>
+        <a:font script="Java" typeface="Javanese Text"/>
+        <a:font script="Lisu" typeface="Segoe UI"/>
+        <a:font script="Mymr" typeface="Myanmar Text"/>
+        <a:font script="Nkoo" typeface="Ebrima"/>
+        <a:font script="Olck" typeface="Nirmala UI"/>
+        <a:font script="Osma" typeface="Ebrima"/>
+        <a:font script="Phag" typeface="Phagspa"/>
+        <a:font script="Syrn" typeface="Estrangelo Edessa"/>
+        <a:font script="Syrj" typeface="Estrangelo Edessa"/>
+        <a:font script="Syre" typeface="Estrangelo Edessa"/>
+        <a:font script="Sora" typeface="Nirmala UI"/>
+        <a:font script="Tale" typeface="Microsoft Tai Le"/>
+        <a:font script="Talu" typeface="Microsoft New Tai Lue"/>
+        <a:font script="Tfng" typeface="Ebrima"/>
       </a:minorFont>
     </a:fontScheme>
     <a:fmtScheme name="Office">
@@ -13868,180 +14032,136 @@
           <a:gsLst>
             <a:gs pos="0">
               <a:schemeClr val="phClr">
-                <a:tint val="50000"/>
-                <a:satMod val="300000"/>
+                <a:lumMod val="110000"/>
+                <a:satMod val="105000"/>
+                <a:tint val="67000"/>
               </a:schemeClr>
             </a:gs>
-            <a:gs pos="35000">
+            <a:gs pos="50000">
               <a:schemeClr val="phClr">
-                <a:tint val="37000"/>
-                <a:satMod val="300000"/>
+                <a:lumMod val="105000"/>
+                <a:satMod val="103000"/>
+                <a:tint val="73000"/>
               </a:schemeClr>
             </a:gs>
             <a:gs pos="100000">
               <a:schemeClr val="phClr">
-                <a:tint val="15000"/>
-                <a:satMod val="350000"/>
+                <a:lumMod val="105000"/>
+                <a:satMod val="109000"/>
+                <a:tint val="81000"/>
               </a:schemeClr>
             </a:gs>
           </a:gsLst>
-          <a:lin ang="16200000" scaled="1"/>
+          <a:lin ang="5400000" scaled="0"/>
         </a:gradFill>
         <a:gradFill rotWithShape="1">
           <a:gsLst>
             <a:gs pos="0">
               <a:schemeClr val="phClr">
-                <a:tint val="100000"/>
+                <a:satMod val="103000"/>
+                <a:lumMod val="102000"/>
+                <a:tint val="94000"/>
+              </a:schemeClr>
+            </a:gs>
+            <a:gs pos="50000">
+              <a:schemeClr val="phClr">
+                <a:satMod val="110000"/>
+                <a:lumMod val="100000"/>
                 <a:shade val="100000"/>
-                <a:satMod val="130000"/>
               </a:schemeClr>
             </a:gs>
             <a:gs pos="100000">
               <a:schemeClr val="phClr">
-                <a:tint val="50000"/>
-                <a:shade val="100000"/>
-                <a:satMod val="350000"/>
+                <a:lumMod val="99000"/>
+                <a:satMod val="120000"/>
+                <a:shade val="78000"/>
               </a:schemeClr>
             </a:gs>
           </a:gsLst>
-          <a:lin ang="16200000" scaled="0"/>
+          <a:lin ang="5400000" scaled="0"/>
         </a:gradFill>
       </a:fillStyleLst>
       <a:lnStyleLst>
-        <a:ln w="9525" cap="flat" cmpd="sng" algn="ctr">
+        <a:ln w="12700" cap="flat" cmpd="sng" algn="ctr">
           <a:solidFill>
-            <a:schemeClr val="phClr">
-              <a:shade val="95000"/>
-              <a:satMod val="105000"/>
-            </a:schemeClr>
+            <a:schemeClr val="phClr"/>
           </a:solidFill>
           <a:prstDash val="solid"/>
+          <a:miter lim="800000"/>
+        </a:ln>
+        <a:ln w="19050" cap="flat" cmpd="sng" algn="ctr">
+          <a:solidFill>
+            <a:schemeClr val="phClr"/>
+          </a:solidFill>
+          <a:prstDash val="solid"/>
+          <a:miter lim="800000"/>
         </a:ln>
         <a:ln w="25400" cap="flat" cmpd="sng" algn="ctr">
           <a:solidFill>
             <a:schemeClr val="phClr"/>
           </a:solidFill>
           <a:prstDash val="solid"/>
-        </a:ln>
-        <a:ln w="38100" cap="flat" cmpd="sng" algn="ctr">
-          <a:solidFill>
-            <a:schemeClr val="phClr"/>
-          </a:solidFill>
-          <a:prstDash val="solid"/>
+          <a:miter lim="800000"/>
         </a:ln>
       </a:lnStyleLst>
       <a:effectStyleLst>
         <a:effectStyle>
+          <a:effectLst/>
+        </a:effectStyle>
+        <a:effectStyle>
+          <a:effectLst/>
+        </a:effectStyle>
+        <a:effectStyle>
           <a:effectLst>
-            <a:outerShdw blurRad="40000" dist="20000" dir="5400000" rotWithShape="0">
+            <a:outerShdw blurRad="57150" dist="19050" dir="5400000" algn="ctr" rotWithShape="0">
               <a:srgbClr val="000000">
-                <a:alpha val="38000"/>
+                <a:alpha val="63000"/>
               </a:srgbClr>
             </a:outerShdw>
           </a:effectLst>
-        </a:effectStyle>
-        <a:effectStyle>
-          <a:effectLst>
-            <a:outerShdw blurRad="40000" dist="23000" dir="5400000" rotWithShape="0">
-              <a:srgbClr val="000000">
-                <a:alpha val="35000"/>
-              </a:srgbClr>
-            </a:outerShdw>
-          </a:effectLst>
-        </a:effectStyle>
-        <a:effectStyle>
-          <a:effectLst>
-            <a:outerShdw blurRad="40000" dist="23000" dir="5400000" rotWithShape="0">
-              <a:srgbClr val="000000">
-                <a:alpha val="35000"/>
-              </a:srgbClr>
-            </a:outerShdw>
-          </a:effectLst>
-          <a:scene3d>
-            <a:camera prst="orthographicFront">
-              <a:rot lat="0" lon="0" rev="0"/>
-            </a:camera>
-            <a:lightRig rig="threePt" dir="t">
-              <a:rot lat="0" lon="0" rev="1200000"/>
-            </a:lightRig>
-          </a:scene3d>
-          <a:sp3d>
-            <a:bevelT w="63500" h="25400"/>
-          </a:sp3d>
         </a:effectStyle>
       </a:effectStyleLst>
       <a:bgFillStyleLst>
         <a:solidFill>
           <a:schemeClr val="phClr"/>
         </a:solidFill>
+        <a:solidFill>
+          <a:schemeClr val="phClr">
+            <a:tint val="95000"/>
+            <a:satMod val="170000"/>
+          </a:schemeClr>
+        </a:solidFill>
         <a:gradFill rotWithShape="1">
           <a:gsLst>
             <a:gs pos="0">
               <a:schemeClr val="phClr">
-                <a:tint val="40000"/>
-                <a:satMod val="350000"/>
+                <a:tint val="93000"/>
+                <a:satMod val="150000"/>
+                <a:shade val="98000"/>
+                <a:lumMod val="102000"/>
               </a:schemeClr>
             </a:gs>
-            <a:gs pos="40000">
+            <a:gs pos="50000">
               <a:schemeClr val="phClr">
-                <a:tint val="45000"/>
-                <a:shade val="99000"/>
-                <a:satMod val="350000"/>
+                <a:tint val="98000"/>
+                <a:satMod val="130000"/>
+                <a:shade val="90000"/>
+                <a:lumMod val="103000"/>
               </a:schemeClr>
             </a:gs>
             <a:gs pos="100000">
               <a:schemeClr val="phClr">
-                <a:shade val="20000"/>
-                <a:satMod val="255000"/>
+                <a:shade val="63000"/>
+                <a:satMod val="120000"/>
               </a:schemeClr>
             </a:gs>
           </a:gsLst>
-          <a:path path="circle">
-            <a:fillToRect l="50000" t="-80000" r="50000" b="180000"/>
-          </a:path>
-        </a:gradFill>
-        <a:gradFill rotWithShape="1">
-          <a:gsLst>
-            <a:gs pos="0">
-              <a:schemeClr val="phClr">
-                <a:tint val="80000"/>
-                <a:satMod val="300000"/>
-              </a:schemeClr>
-            </a:gs>
-            <a:gs pos="100000">
-              <a:schemeClr val="phClr">
-                <a:shade val="30000"/>
-                <a:satMod val="200000"/>
-              </a:schemeClr>
-            </a:gs>
-          </a:gsLst>
-          <a:path path="circle">
-            <a:fillToRect l="50000" t="50000" r="50000" b="50000"/>
-          </a:path>
+          <a:lin ang="5400000" scaled="0"/>
         </a:gradFill>
       </a:bgFillStyleLst>
     </a:fmtScheme>
   </a:themeElements>
   <a:objectDefaults>
-    <a:spDef>
-      <a:spPr/>
-      <a:bodyPr/>
-      <a:lstStyle/>
-      <a:style>
-        <a:lnRef idx="1">
-          <a:schemeClr val="accent1"/>
-        </a:lnRef>
-        <a:fillRef idx="3">
-          <a:schemeClr val="accent1"/>
-        </a:fillRef>
-        <a:effectRef idx="2">
-          <a:schemeClr val="accent1"/>
-        </a:effectRef>
-        <a:fontRef idx="minor">
-          <a:schemeClr val="lt1"/>
-        </a:fontRef>
-      </a:style>
-    </a:spDef>
     <a:lnDef>
       <a:spPr/>
       <a:bodyPr/>
@@ -14063,5 +14183,10 @@
     </a:lnDef>
   </a:objectDefaults>
   <a:extraClrSchemeLst/>
+  <a:extLst>
+    <a:ext uri="{05A4C25C-085E-4340-85A3-A5531E510DB2}">
+      <thm15:themeFamily xmlns:thm15="http://schemas.microsoft.com/office/thememl/2012/main" name="Office Theme" id="{2E142A2C-CD16-42D6-873A-C26D2A0506FA}" vid="{1BDDFF52-6CD6-40A5-AB3C-68EB2F1E4D0A}"/>
+    </a:ext>
+  </a:extLst>
 </a:theme>
 </file>